--- a/output/fig_flowchart.pptx
+++ b/output/fig_flowchart.pptx
@@ -2630,114 +2630,159 @@
           </p:nvSpPr>
           <p:spPr>
             <a:xfrm>
-              <a:off x="5786155" y="0"/>
-              <a:ext cx="2586600" cy="5524412"/>
+              <a:off x="5250580" y="499197"/>
+              <a:ext cx="2500464" cy="2087704"/>
             </a:xfrm>
             <a:custGeom>
               <a:avLst/>
               <a:pathLst>
-                <a:path w="2586600" h="5524412">
+                <a:path w="2500464" h="2087704">
                   <a:moveTo>
-                    <a:pt x="63262" y="5524412"/>
+                    <a:pt x="63262" y="2087704"/>
                   </a:moveTo>
                   <a:lnTo>
-                    <a:pt x="2523337" y="5524412"/>
-                  </a:lnTo>
-                  <a:lnTo>
-                    <a:pt x="2520790" y="5524360"/>
-                  </a:lnTo>
-                  <a:lnTo>
-                    <a:pt x="2530963" y="5523950"/>
-                  </a:lnTo>
-                  <a:lnTo>
-                    <a:pt x="2540938" y="5521914"/>
-                  </a:lnTo>
-                  <a:lnTo>
-                    <a:pt x="2550458" y="5518304"/>
-                  </a:lnTo>
-                  <a:lnTo>
-                    <a:pt x="2559275" y="5513213"/>
-                  </a:lnTo>
-                  <a:lnTo>
-                    <a:pt x="2567161" y="5506774"/>
-                  </a:lnTo>
-                  <a:lnTo>
-                    <a:pt x="2573912" y="5499153"/>
-                  </a:lnTo>
-                  <a:lnTo>
-                    <a:pt x="2579354" y="5490548"/>
-                  </a:lnTo>
-                  <a:lnTo>
-                    <a:pt x="2583344" y="5481182"/>
-                  </a:lnTo>
-                  <a:lnTo>
-                    <a:pt x="2585781" y="5471297"/>
-                  </a:lnTo>
-                  <a:lnTo>
-                    <a:pt x="2586600" y="5461149"/>
-                  </a:lnTo>
-                  <a:lnTo>
-                    <a:pt x="2586600" y="25250"/>
-                  </a:lnTo>
-                  <a:lnTo>
-                    <a:pt x="2585781" y="15102"/>
-                  </a:lnTo>
-                  <a:lnTo>
-                    <a:pt x="2583344" y="5217"/>
-                  </a:lnTo>
-                  <a:lnTo>
-                    <a:pt x="2581122" y="0"/>
-                  </a:lnTo>
-                  <a:lnTo>
-                    <a:pt x="5300" y="0"/>
-                  </a:lnTo>
-                  <a:lnTo>
-                    <a:pt x="5062" y="453"/>
-                  </a:lnTo>
-                  <a:lnTo>
-                    <a:pt x="1838" y="10110"/>
-                  </a:lnTo>
-                  <a:lnTo>
-                    <a:pt x="205" y="20160"/>
-                  </a:lnTo>
-                  <a:lnTo>
-                    <a:pt x="0" y="25250"/>
-                  </a:lnTo>
-                  <a:lnTo>
-                    <a:pt x="0" y="5461149"/>
-                  </a:lnTo>
-                  <a:lnTo>
-                    <a:pt x="205" y="5456058"/>
-                  </a:lnTo>
-                  <a:lnTo>
-                    <a:pt x="205" y="5466239"/>
-                  </a:lnTo>
-                  <a:lnTo>
-                    <a:pt x="1838" y="5476289"/>
-                  </a:lnTo>
-                  <a:lnTo>
-                    <a:pt x="5062" y="5485946"/>
-                  </a:lnTo>
-                  <a:lnTo>
-                    <a:pt x="9793" y="5494961"/>
-                  </a:lnTo>
-                  <a:lnTo>
-                    <a:pt x="15909" y="5503100"/>
-                  </a:lnTo>
-                  <a:lnTo>
-                    <a:pt x="23252" y="5510152"/>
-                  </a:lnTo>
-                  <a:lnTo>
-                    <a:pt x="31631" y="5515936"/>
-                  </a:lnTo>
-                  <a:lnTo>
-                    <a:pt x="40829" y="5520300"/>
-                  </a:lnTo>
-                  <a:lnTo>
-                    <a:pt x="50608" y="5523133"/>
-                  </a:lnTo>
-                  <a:lnTo>
-                    <a:pt x="60715" y="5524360"/>
+                    <a:pt x="2437201" y="2087704"/>
+                  </a:lnTo>
+                  <a:lnTo>
+                    <a:pt x="2434654" y="2087652"/>
+                  </a:lnTo>
+                  <a:lnTo>
+                    <a:pt x="2444826" y="2087242"/>
+                  </a:lnTo>
+                  <a:lnTo>
+                    <a:pt x="2454802" y="2085206"/>
+                  </a:lnTo>
+                  <a:lnTo>
+                    <a:pt x="2464321" y="2081596"/>
+                  </a:lnTo>
+                  <a:lnTo>
+                    <a:pt x="2473138" y="2076505"/>
+                  </a:lnTo>
+                  <a:lnTo>
+                    <a:pt x="2481025" y="2070066"/>
+                  </a:lnTo>
+                  <a:lnTo>
+                    <a:pt x="2487776" y="2062445"/>
+                  </a:lnTo>
+                  <a:lnTo>
+                    <a:pt x="2493217" y="2053840"/>
+                  </a:lnTo>
+                  <a:lnTo>
+                    <a:pt x="2497208" y="2044474"/>
+                  </a:lnTo>
+                  <a:lnTo>
+                    <a:pt x="2499645" y="2034589"/>
+                  </a:lnTo>
+                  <a:lnTo>
+                    <a:pt x="2500464" y="2024441"/>
+                  </a:lnTo>
+                  <a:lnTo>
+                    <a:pt x="2500464" y="63262"/>
+                  </a:lnTo>
+                  <a:lnTo>
+                    <a:pt x="2499645" y="53114"/>
+                  </a:lnTo>
+                  <a:lnTo>
+                    <a:pt x="2497208" y="43229"/>
+                  </a:lnTo>
+                  <a:lnTo>
+                    <a:pt x="2493217" y="33863"/>
+                  </a:lnTo>
+                  <a:lnTo>
+                    <a:pt x="2487776" y="25258"/>
+                  </a:lnTo>
+                  <a:lnTo>
+                    <a:pt x="2481025" y="17637"/>
+                  </a:lnTo>
+                  <a:lnTo>
+                    <a:pt x="2473138" y="11198"/>
+                  </a:lnTo>
+                  <a:lnTo>
+                    <a:pt x="2464321" y="6107"/>
+                  </a:lnTo>
+                  <a:lnTo>
+                    <a:pt x="2454802" y="2497"/>
+                  </a:lnTo>
+                  <a:lnTo>
+                    <a:pt x="2444826" y="461"/>
+                  </a:lnTo>
+                  <a:lnTo>
+                    <a:pt x="2437201" y="0"/>
+                  </a:lnTo>
+                  <a:lnTo>
+                    <a:pt x="63262" y="0"/>
+                  </a:lnTo>
+                  <a:lnTo>
+                    <a:pt x="70888" y="461"/>
+                  </a:lnTo>
+                  <a:lnTo>
+                    <a:pt x="60715" y="51"/>
+                  </a:lnTo>
+                  <a:lnTo>
+                    <a:pt x="50608" y="1278"/>
+                  </a:lnTo>
+                  <a:lnTo>
+                    <a:pt x="40829" y="4111"/>
+                  </a:lnTo>
+                  <a:lnTo>
+                    <a:pt x="31631" y="8475"/>
+                  </a:lnTo>
+                  <a:lnTo>
+                    <a:pt x="23252" y="14259"/>
+                  </a:lnTo>
+                  <a:lnTo>
+                    <a:pt x="15909" y="21311"/>
+                  </a:lnTo>
+                  <a:lnTo>
+                    <a:pt x="9793" y="29450"/>
+                  </a:lnTo>
+                  <a:lnTo>
+                    <a:pt x="5062" y="38465"/>
+                  </a:lnTo>
+                  <a:lnTo>
+                    <a:pt x="1838" y="48122"/>
+                  </a:lnTo>
+                  <a:lnTo>
+                    <a:pt x="205" y="58172"/>
+                  </a:lnTo>
+                  <a:lnTo>
+                    <a:pt x="0" y="63262"/>
+                  </a:lnTo>
+                  <a:lnTo>
+                    <a:pt x="0" y="2024441"/>
+                  </a:lnTo>
+                  <a:lnTo>
+                    <a:pt x="205" y="2019350"/>
+                  </a:lnTo>
+                  <a:lnTo>
+                    <a:pt x="205" y="2029531"/>
+                  </a:lnTo>
+                  <a:lnTo>
+                    <a:pt x="1838" y="2039581"/>
+                  </a:lnTo>
+                  <a:lnTo>
+                    <a:pt x="5062" y="2049238"/>
+                  </a:lnTo>
+                  <a:lnTo>
+                    <a:pt x="9793" y="2058253"/>
+                  </a:lnTo>
+                  <a:lnTo>
+                    <a:pt x="15909" y="2066392"/>
+                  </a:lnTo>
+                  <a:lnTo>
+                    <a:pt x="23252" y="2073444"/>
+                  </a:lnTo>
+                  <a:lnTo>
+                    <a:pt x="31631" y="2079228"/>
+                  </a:lnTo>
+                  <a:lnTo>
+                    <a:pt x="40829" y="2083593"/>
+                  </a:lnTo>
+                  <a:lnTo>
+                    <a:pt x="50608" y="2086425"/>
+                  </a:lnTo>
+                  <a:lnTo>
+                    <a:pt x="60715" y="2087652"/>
                   </a:lnTo>
                   <a:close/>
                 </a:path>
@@ -2772,7 +2817,7 @@
           </p:nvSpPr>
           <p:spPr>
             <a:xfrm>
-              <a:off x="6002155" y="177987"/>
+              <a:off x="5466580" y="715197"/>
               <a:ext cx="954084" cy="92080"/>
             </a:xfrm>
             <a:prstGeom prst="rect">
@@ -2815,8 +2860,8 @@
           </p:nvSpPr>
           <p:spPr>
             <a:xfrm>
-              <a:off x="6002155" y="351723"/>
-              <a:ext cx="1387236" cy="92080"/>
+              <a:off x="5466580" y="888933"/>
+              <a:ext cx="1481236" cy="92080"/>
             </a:xfrm>
             <a:prstGeom prst="rect">
               <a:avLst/>
@@ -2845,7 +2890,7 @@
                   <a:latin typeface="luciole"/>
                   <a:cs typeface="luciole"/>
                 </a:rPr>
-                <a:t>- CHU Angers (n = 119)</a:t>
+                <a:t>- Autre anapath (n = 84)</a:t>
               </a:r>
             </a:p>
           </p:txBody>
@@ -2858,8 +2903,8 @@
           </p:nvSpPr>
           <p:spPr>
             <a:xfrm>
-              <a:off x="6002155" y="525459"/>
-              <a:ext cx="1563624" cy="92080"/>
+              <a:off x="5466580" y="1062669"/>
+              <a:ext cx="1405158" cy="92080"/>
             </a:xfrm>
             <a:prstGeom prst="rect">
               <a:avLst/>
@@ -2888,7 +2933,7 @@
                   <a:latin typeface="luciole"/>
                   <a:cs typeface="luciole"/>
                 </a:rPr>
-                <a:t>  - Autre anapath (n = 64)</a:t>
+                <a:t>- Non opérable (n = 43)</a:t>
               </a:r>
             </a:p>
           </p:txBody>
@@ -2901,8 +2946,8 @@
           </p:nvSpPr>
           <p:spPr>
             <a:xfrm>
-              <a:off x="6002155" y="699195"/>
-              <a:ext cx="1484345" cy="92080"/>
+              <a:off x="5466580" y="1236405"/>
+              <a:ext cx="1403238" cy="92080"/>
             </a:xfrm>
             <a:prstGeom prst="rect">
               <a:avLst/>
@@ -2931,7 +2976,7 @@
                   <a:latin typeface="luciole"/>
                   <a:cs typeface="luciole"/>
                 </a:rPr>
-                <a:t>  - Non opérable (n = 22)</a:t>
+                <a:t>- Métastatique (n = 38)</a:t>
               </a:r>
             </a:p>
           </p:txBody>
@@ -2944,8 +2989,8 @@
           </p:nvSpPr>
           <p:spPr>
             <a:xfrm>
-              <a:off x="6002155" y="872931"/>
-              <a:ext cx="1585203" cy="92080"/>
+              <a:off x="5466580" y="1410141"/>
+              <a:ext cx="1491752" cy="92080"/>
             </a:xfrm>
             <a:prstGeom prst="rect">
               <a:avLst/>
@@ -2974,7 +3019,7 @@
                   <a:latin typeface="luciole"/>
                   <a:cs typeface="luciole"/>
                 </a:rPr>
-                <a:t>  - Chimio ailleurs (n = 20)</a:t>
+                <a:t>- Chimio ailleurs (n = 36)</a:t>
               </a:r>
             </a:p>
           </p:txBody>
@@ -2987,8 +3032,8 @@
           </p:nvSpPr>
           <p:spPr>
             <a:xfrm>
-              <a:off x="6002155" y="1046667"/>
-              <a:ext cx="1411925" cy="92080"/>
+              <a:off x="5466580" y="1583877"/>
+              <a:ext cx="1367759" cy="92080"/>
             </a:xfrm>
             <a:prstGeom prst="rect">
               <a:avLst/>
@@ -3017,7 +3062,7 @@
                   <a:latin typeface="luciole"/>
                   <a:cs typeface="luciole"/>
                 </a:rPr>
-                <a:t>  - Métastatique (n = 5)</a:t>
+                <a:t>- Autre chimio (n = 15)</a:t>
               </a:r>
             </a:p>
           </p:txBody>
@@ -3030,8 +3075,8 @@
           </p:nvSpPr>
           <p:spPr>
             <a:xfrm>
-              <a:off x="6002155" y="1220403"/>
-              <a:ext cx="1389065" cy="92080"/>
+              <a:off x="5466580" y="1757613"/>
+              <a:ext cx="947044" cy="92080"/>
             </a:xfrm>
             <a:prstGeom prst="rect">
               <a:avLst/>
@@ -3060,7 +3105,7 @@
                   <a:latin typeface="luciole"/>
                   <a:cs typeface="luciole"/>
                 </a:rPr>
-                <a:t>  - Autre chimio (n = 5)</a:t>
+                <a:t>- Autre (n = 10)</a:t>
               </a:r>
             </a:p>
           </p:txBody>
@@ -3073,8 +3118,8 @@
           </p:nvSpPr>
           <p:spPr>
             <a:xfrm>
-              <a:off x="6002155" y="1394139"/>
-              <a:ext cx="955090" cy="92080"/>
+              <a:off x="5466580" y="1931349"/>
+              <a:ext cx="1851842" cy="92080"/>
             </a:xfrm>
             <a:prstGeom prst="rect">
               <a:avLst/>
@@ -3103,7 +3148,7 @@
                   <a:latin typeface="luciole"/>
                   <a:cs typeface="luciole"/>
                 </a:rPr>
-                <a:t>  - Autre (n = 2)</a:t>
+                <a:t>- Décès post-opératoire (n = 4)</a:t>
               </a:r>
             </a:p>
           </p:txBody>
@@ -3116,8 +3161,8 @@
           </p:nvSpPr>
           <p:spPr>
             <a:xfrm>
-              <a:off x="6002155" y="1567875"/>
-              <a:ext cx="698693" cy="92080"/>
+              <a:off x="5466580" y="2105085"/>
+              <a:ext cx="2068464" cy="92080"/>
             </a:xfrm>
             <a:prstGeom prst="rect">
               <a:avLst/>
@@ -3146,7 +3191,7 @@
                   <a:latin typeface="luciole"/>
                   <a:cs typeface="luciole"/>
                 </a:rPr>
-                <a:t>  - 9 (n = 1)</a:t>
+                <a:t>- Décès précoce après le dg (n = 3)</a:t>
               </a:r>
             </a:p>
           </p:txBody>
@@ -3159,8 +3204,8 @@
           </p:nvSpPr>
           <p:spPr>
             <a:xfrm>
-              <a:off x="6002155" y="1741611"/>
-              <a:ext cx="1348740" cy="92080"/>
+              <a:off x="5466580" y="2278821"/>
+              <a:ext cx="612556" cy="92080"/>
             </a:xfrm>
             <a:prstGeom prst="rect">
               <a:avLst/>
@@ -3189,880 +3234,20 @@
                   <a:latin typeface="luciole"/>
                   <a:cs typeface="luciole"/>
                 </a:rPr>
-                <a:t>- CHU Nantes (n = 90)</a:t>
+                <a:t>- 9 (n = 1)</a:t>
               </a:r>
             </a:p>
           </p:txBody>
         </p:sp>
         <p:sp>
           <p:nvSpPr>
-            <p:cNvPr id="20" name="tx20"/>
+            <p:cNvPr id="20" name="pg20"/>
             <p:cNvSpPr/>
             <p:nvPr/>
           </p:nvSpPr>
           <p:spPr>
             <a:xfrm>
-              <a:off x="6002155" y="1915347"/>
-              <a:ext cx="1490837" cy="92080"/>
-            </a:xfrm>
-            <a:prstGeom prst="rect">
-              <a:avLst/>
-            </a:prstGeom>
-            <a:noFill/>
-          </p:spPr>
-          <p:txBody>
-            <a:bodyPr lIns="0" rIns="0" tIns="0" bIns="0" anchorCtr="1" anchor="ctr" wrap="none"/>
-            <a:lstStyle/>
-            <a:p>
-              <a:pPr algn="l" marL="0" marR="0" indent="0">
-                <a:spcBef>
-                  <a:spcPts val="0"/>
-                </a:spcBef>
-                <a:spcAft>
-                  <a:spcPts val="0"/>
-                </a:spcAft>
-              </a:pPr>
-              <a:r>
-                <a:rPr sz="950" i="0" b="0">
-                  <a:solidFill>
-                    <a:srgbClr val="555555">
-                      <a:alpha val="100000"/>
-                    </a:srgbClr>
-                  </a:solidFill>
-                  <a:latin typeface="luciole"/>
-                  <a:cs typeface="luciole"/>
-                </a:rPr>
-                <a:t>  - Métastatique (n = 28)</a:t>
-              </a:r>
-            </a:p>
-          </p:txBody>
-        </p:sp>
-        <p:sp>
-          <p:nvSpPr>
-            <p:cNvPr id="21" name="tx21"/>
-            <p:cNvSpPr/>
-            <p:nvPr/>
-          </p:nvSpPr>
-          <p:spPr>
-            <a:xfrm>
-              <a:off x="6002155" y="2089083"/>
-              <a:ext cx="1497604" cy="92080"/>
-            </a:xfrm>
-            <a:prstGeom prst="rect">
-              <a:avLst/>
-            </a:prstGeom>
-            <a:noFill/>
-          </p:spPr>
-          <p:txBody>
-            <a:bodyPr lIns="0" rIns="0" tIns="0" bIns="0" anchorCtr="1" anchor="ctr" wrap="none"/>
-            <a:lstStyle/>
-            <a:p>
-              <a:pPr algn="l" marL="0" marR="0" indent="0">
-                <a:spcBef>
-                  <a:spcPts val="0"/>
-                </a:spcBef>
-                <a:spcAft>
-                  <a:spcPts val="0"/>
-                </a:spcAft>
-              </a:pPr>
-              <a:r>
-                <a:rPr sz="950" i="0" b="0">
-                  <a:solidFill>
-                    <a:srgbClr val="555555">
-                      <a:alpha val="100000"/>
-                    </a:srgbClr>
-                  </a:solidFill>
-                  <a:latin typeface="luciole"/>
-                  <a:cs typeface="luciole"/>
-                </a:rPr>
-                <a:t>  - Non opérable (n = 20)</a:t>
-              </a:r>
-            </a:p>
-          </p:txBody>
-        </p:sp>
-        <p:sp>
-          <p:nvSpPr>
-            <p:cNvPr id="22" name="tx22"/>
-            <p:cNvSpPr/>
-            <p:nvPr/>
-          </p:nvSpPr>
-          <p:spPr>
-            <a:xfrm>
-              <a:off x="6002155" y="2262819"/>
-              <a:ext cx="1553657" cy="92080"/>
-            </a:xfrm>
-            <a:prstGeom prst="rect">
-              <a:avLst/>
-            </a:prstGeom>
-            <a:noFill/>
-          </p:spPr>
-          <p:txBody>
-            <a:bodyPr lIns="0" rIns="0" tIns="0" bIns="0" anchorCtr="1" anchor="ctr" wrap="none"/>
-            <a:lstStyle/>
-            <a:p>
-              <a:pPr algn="l" marL="0" marR="0" indent="0">
-                <a:spcBef>
-                  <a:spcPts val="0"/>
-                </a:spcBef>
-                <a:spcAft>
-                  <a:spcPts val="0"/>
-                </a:spcAft>
-              </a:pPr>
-              <a:r>
-                <a:rPr sz="950" i="0" b="0">
-                  <a:solidFill>
-                    <a:srgbClr val="555555">
-                      <a:alpha val="100000"/>
-                    </a:srgbClr>
-                  </a:solidFill>
-                  <a:latin typeface="luciole"/>
-                  <a:cs typeface="luciole"/>
-                </a:rPr>
-                <a:t>  - Autre anapath (n = 18)</a:t>
-              </a:r>
-            </a:p>
-          </p:txBody>
-        </p:sp>
-        <p:sp>
-          <p:nvSpPr>
-            <p:cNvPr id="23" name="tx23"/>
-            <p:cNvSpPr/>
-            <p:nvPr/>
-          </p:nvSpPr>
-          <p:spPr>
-            <a:xfrm>
-              <a:off x="6002155" y="2436555"/>
-              <a:ext cx="1575054" cy="92080"/>
-            </a:xfrm>
-            <a:prstGeom prst="rect">
-              <a:avLst/>
-            </a:prstGeom>
-            <a:noFill/>
-          </p:spPr>
-          <p:txBody>
-            <a:bodyPr lIns="0" rIns="0" tIns="0" bIns="0" anchorCtr="1" anchor="ctr" wrap="none"/>
-            <a:lstStyle/>
-            <a:p>
-              <a:pPr algn="l" marL="0" marR="0" indent="0">
-                <a:spcBef>
-                  <a:spcPts val="0"/>
-                </a:spcBef>
-                <a:spcAft>
-                  <a:spcPts val="0"/>
-                </a:spcAft>
-              </a:pPr>
-              <a:r>
-                <a:rPr sz="950" i="0" b="0">
-                  <a:solidFill>
-                    <a:srgbClr val="555555">
-                      <a:alpha val="100000"/>
-                    </a:srgbClr>
-                  </a:solidFill>
-                  <a:latin typeface="luciole"/>
-                  <a:cs typeface="luciole"/>
-                </a:rPr>
-                <a:t>  - Chimio ailleurs (n = 14)</a:t>
-              </a:r>
-            </a:p>
-          </p:txBody>
-        </p:sp>
-        <p:sp>
-          <p:nvSpPr>
-            <p:cNvPr id="24" name="tx24"/>
-            <p:cNvSpPr/>
-            <p:nvPr/>
-          </p:nvSpPr>
-          <p:spPr>
-            <a:xfrm>
-              <a:off x="6002155" y="2610291"/>
-              <a:ext cx="1395100" cy="92080"/>
-            </a:xfrm>
-            <a:prstGeom prst="rect">
-              <a:avLst/>
-            </a:prstGeom>
-            <a:noFill/>
-          </p:spPr>
-          <p:txBody>
-            <a:bodyPr lIns="0" rIns="0" tIns="0" bIns="0" anchorCtr="1" anchor="ctr" wrap="none"/>
-            <a:lstStyle/>
-            <a:p>
-              <a:pPr algn="l" marL="0" marR="0" indent="0">
-                <a:spcBef>
-                  <a:spcPts val="0"/>
-                </a:spcBef>
-                <a:spcAft>
-                  <a:spcPts val="0"/>
-                </a:spcAft>
-              </a:pPr>
-              <a:r>
-                <a:rPr sz="950" i="0" b="0">
-                  <a:solidFill>
-                    <a:srgbClr val="555555">
-                      <a:alpha val="100000"/>
-                    </a:srgbClr>
-                  </a:solidFill>
-                  <a:latin typeface="luciole"/>
-                  <a:cs typeface="luciole"/>
-                </a:rPr>
-                <a:t>  - Autre chimio (n = 4)</a:t>
-              </a:r>
-            </a:p>
-          </p:txBody>
-        </p:sp>
-        <p:sp>
-          <p:nvSpPr>
-            <p:cNvPr id="25" name="tx25"/>
-            <p:cNvSpPr/>
-            <p:nvPr/>
-          </p:nvSpPr>
-          <p:spPr>
-            <a:xfrm>
-              <a:off x="6002155" y="2784027"/>
-              <a:ext cx="2154600" cy="92080"/>
-            </a:xfrm>
-            <a:prstGeom prst="rect">
-              <a:avLst/>
-            </a:prstGeom>
-            <a:noFill/>
-          </p:spPr>
-          <p:txBody>
-            <a:bodyPr lIns="0" rIns="0" tIns="0" bIns="0" anchorCtr="1" anchor="ctr" wrap="none"/>
-            <a:lstStyle/>
-            <a:p>
-              <a:pPr algn="l" marL="0" marR="0" indent="0">
-                <a:spcBef>
-                  <a:spcPts val="0"/>
-                </a:spcBef>
-                <a:spcAft>
-                  <a:spcPts val="0"/>
-                </a:spcAft>
-              </a:pPr>
-              <a:r>
-                <a:rPr sz="950" i="0" b="0">
-                  <a:solidFill>
-                    <a:srgbClr val="555555">
-                      <a:alpha val="100000"/>
-                    </a:srgbClr>
-                  </a:solidFill>
-                  <a:latin typeface="luciole"/>
-                  <a:cs typeface="luciole"/>
-                </a:rPr>
-                <a:t>  - Décès précoce après le dg (n = 3)</a:t>
-              </a:r>
-            </a:p>
-          </p:txBody>
-        </p:sp>
-        <p:sp>
-          <p:nvSpPr>
-            <p:cNvPr id="26" name="tx26"/>
-            <p:cNvSpPr/>
-            <p:nvPr/>
-          </p:nvSpPr>
-          <p:spPr>
-            <a:xfrm>
-              <a:off x="6002155" y="2957763"/>
-              <a:ext cx="1929566" cy="92080"/>
-            </a:xfrm>
-            <a:prstGeom prst="rect">
-              <a:avLst/>
-            </a:prstGeom>
-            <a:noFill/>
-          </p:spPr>
-          <p:txBody>
-            <a:bodyPr lIns="0" rIns="0" tIns="0" bIns="0" anchorCtr="1" anchor="ctr" wrap="none"/>
-            <a:lstStyle/>
-            <a:p>
-              <a:pPr algn="l" marL="0" marR="0" indent="0">
-                <a:spcBef>
-                  <a:spcPts val="0"/>
-                </a:spcBef>
-                <a:spcAft>
-                  <a:spcPts val="0"/>
-                </a:spcAft>
-              </a:pPr>
-              <a:r>
-                <a:rPr sz="950" i="0" b="0">
-                  <a:solidFill>
-                    <a:srgbClr val="555555">
-                      <a:alpha val="100000"/>
-                    </a:srgbClr>
-                  </a:solidFill>
-                  <a:latin typeface="luciole"/>
-                  <a:cs typeface="luciole"/>
-                </a:rPr>
-                <a:t>  - Décès post-opératoire (n = 2)</a:t>
-              </a:r>
-            </a:p>
-          </p:txBody>
-        </p:sp>
-        <p:sp>
-          <p:nvSpPr>
-            <p:cNvPr id="27" name="tx27"/>
-            <p:cNvSpPr/>
-            <p:nvPr/>
-          </p:nvSpPr>
-          <p:spPr>
-            <a:xfrm>
-              <a:off x="6002155" y="3131499"/>
-              <a:ext cx="949787" cy="92080"/>
-            </a:xfrm>
-            <a:prstGeom prst="rect">
-              <a:avLst/>
-            </a:prstGeom>
-            <a:noFill/>
-          </p:spPr>
-          <p:txBody>
-            <a:bodyPr lIns="0" rIns="0" tIns="0" bIns="0" anchorCtr="1" anchor="ctr" wrap="none"/>
-            <a:lstStyle/>
-            <a:p>
-              <a:pPr algn="l" marL="0" marR="0" indent="0">
-                <a:spcBef>
-                  <a:spcPts val="0"/>
-                </a:spcBef>
-                <a:spcAft>
-                  <a:spcPts val="0"/>
-                </a:spcAft>
-              </a:pPr>
-              <a:r>
-                <a:rPr sz="950" i="0" b="0">
-                  <a:solidFill>
-                    <a:srgbClr val="555555">
-                      <a:alpha val="100000"/>
-                    </a:srgbClr>
-                  </a:solidFill>
-                  <a:latin typeface="luciole"/>
-                  <a:cs typeface="luciole"/>
-                </a:rPr>
-                <a:t>  - Autre (n = 1)</a:t>
-              </a:r>
-            </a:p>
-          </p:txBody>
-        </p:sp>
-        <p:sp>
-          <p:nvSpPr>
-            <p:cNvPr id="28" name="tx28"/>
-            <p:cNvSpPr/>
-            <p:nvPr/>
-          </p:nvSpPr>
-          <p:spPr>
-            <a:xfrm>
-              <a:off x="6002155" y="3305235"/>
-              <a:ext cx="1191097" cy="92080"/>
-            </a:xfrm>
-            <a:prstGeom prst="rect">
-              <a:avLst/>
-            </a:prstGeom>
-            <a:noFill/>
-          </p:spPr>
-          <p:txBody>
-            <a:bodyPr lIns="0" rIns="0" tIns="0" bIns="0" anchorCtr="1" anchor="ctr" wrap="none"/>
-            <a:lstStyle/>
-            <a:p>
-              <a:pPr algn="l" marL="0" marR="0" indent="0">
-                <a:spcBef>
-                  <a:spcPts val="0"/>
-                </a:spcBef>
-                <a:spcAft>
-                  <a:spcPts val="0"/>
-                </a:spcAft>
-              </a:pPr>
-              <a:r>
-                <a:rPr sz="950" i="0" b="0">
-                  <a:solidFill>
-                    <a:srgbClr val="555555">
-                      <a:alpha val="100000"/>
-                    </a:srgbClr>
-                  </a:solidFill>
-                  <a:latin typeface="luciole"/>
-                  <a:cs typeface="luciole"/>
-                </a:rPr>
-                <a:t>- CHU Lyon (n = 14)</a:t>
-              </a:r>
-            </a:p>
-          </p:txBody>
-        </p:sp>
-        <p:sp>
-          <p:nvSpPr>
-            <p:cNvPr id="29" name="tx29"/>
-            <p:cNvSpPr/>
-            <p:nvPr/>
-          </p:nvSpPr>
-          <p:spPr>
-            <a:xfrm>
-              <a:off x="6002155" y="3478971"/>
-              <a:ext cx="962497" cy="92080"/>
-            </a:xfrm>
-            <a:prstGeom prst="rect">
-              <a:avLst/>
-            </a:prstGeom>
-            <a:noFill/>
-          </p:spPr>
-          <p:txBody>
-            <a:bodyPr lIns="0" rIns="0" tIns="0" bIns="0" anchorCtr="1" anchor="ctr" wrap="none"/>
-            <a:lstStyle/>
-            <a:p>
-              <a:pPr algn="l" marL="0" marR="0" indent="0">
-                <a:spcBef>
-                  <a:spcPts val="0"/>
-                </a:spcBef>
-                <a:spcAft>
-                  <a:spcPts val="0"/>
-                </a:spcAft>
-              </a:pPr>
-              <a:r>
-                <a:rPr sz="950" i="0" b="0">
-                  <a:solidFill>
-                    <a:srgbClr val="555555">
-                      <a:alpha val="100000"/>
-                    </a:srgbClr>
-                  </a:solidFill>
-                  <a:latin typeface="luciole"/>
-                  <a:cs typeface="luciole"/>
-                </a:rPr>
-                <a:t>  - Autre (n = 6)</a:t>
-              </a:r>
-            </a:p>
-          </p:txBody>
-        </p:sp>
-        <p:sp>
-          <p:nvSpPr>
-            <p:cNvPr id="30" name="tx30"/>
-            <p:cNvSpPr/>
-            <p:nvPr/>
-          </p:nvSpPr>
-          <p:spPr>
-            <a:xfrm>
-              <a:off x="6002155" y="3652707"/>
-              <a:ext cx="1395100" cy="92080"/>
-            </a:xfrm>
-            <a:prstGeom prst="rect">
-              <a:avLst/>
-            </a:prstGeom>
-            <a:noFill/>
-          </p:spPr>
-          <p:txBody>
-            <a:bodyPr lIns="0" rIns="0" tIns="0" bIns="0" anchorCtr="1" anchor="ctr" wrap="none"/>
-            <a:lstStyle/>
-            <a:p>
-              <a:pPr algn="l" marL="0" marR="0" indent="0">
-                <a:spcBef>
-                  <a:spcPts val="0"/>
-                </a:spcBef>
-                <a:spcAft>
-                  <a:spcPts val="0"/>
-                </a:spcAft>
-              </a:pPr>
-              <a:r>
-                <a:rPr sz="950" i="0" b="0">
-                  <a:solidFill>
-                    <a:srgbClr val="555555">
-                      <a:alpha val="100000"/>
-                    </a:srgbClr>
-                  </a:solidFill>
-                  <a:latin typeface="luciole"/>
-                  <a:cs typeface="luciole"/>
-                </a:rPr>
-                <a:t>  - Autre chimio (n = 4)</a:t>
-              </a:r>
-            </a:p>
-          </p:txBody>
-        </p:sp>
-        <p:sp>
-          <p:nvSpPr>
-            <p:cNvPr id="31" name="tx31"/>
-            <p:cNvSpPr/>
-            <p:nvPr/>
-          </p:nvSpPr>
-          <p:spPr>
-            <a:xfrm>
-              <a:off x="6002155" y="3826443"/>
-              <a:ext cx="1501810" cy="92080"/>
-            </a:xfrm>
-            <a:prstGeom prst="rect">
-              <a:avLst/>
-            </a:prstGeom>
-            <a:noFill/>
-          </p:spPr>
-          <p:txBody>
-            <a:bodyPr lIns="0" rIns="0" tIns="0" bIns="0" anchorCtr="1" anchor="ctr" wrap="none"/>
-            <a:lstStyle/>
-            <a:p>
-              <a:pPr algn="l" marL="0" marR="0" indent="0">
-                <a:spcBef>
-                  <a:spcPts val="0"/>
-                </a:spcBef>
-                <a:spcAft>
-                  <a:spcPts val="0"/>
-                </a:spcAft>
-              </a:pPr>
-              <a:r>
-                <a:rPr sz="950" i="0" b="0">
-                  <a:solidFill>
-                    <a:srgbClr val="555555">
-                      <a:alpha val="100000"/>
-                    </a:srgbClr>
-                  </a:solidFill>
-                  <a:latin typeface="luciole"/>
-                  <a:cs typeface="luciole"/>
-                </a:rPr>
-                <a:t>  - Chimio ailleurs (n = 2)</a:t>
-              </a:r>
-            </a:p>
-          </p:txBody>
-        </p:sp>
-        <p:sp>
-          <p:nvSpPr>
-            <p:cNvPr id="32" name="tx32"/>
-            <p:cNvSpPr/>
-            <p:nvPr/>
-          </p:nvSpPr>
-          <p:spPr>
-            <a:xfrm>
-              <a:off x="6002155" y="4000179"/>
-              <a:ext cx="1404244" cy="92080"/>
-            </a:xfrm>
-            <a:prstGeom prst="rect">
-              <a:avLst/>
-            </a:prstGeom>
-            <a:noFill/>
-          </p:spPr>
-          <p:txBody>
-            <a:bodyPr lIns="0" rIns="0" tIns="0" bIns="0" anchorCtr="1" anchor="ctr" wrap="none"/>
-            <a:lstStyle/>
-            <a:p>
-              <a:pPr algn="l" marL="0" marR="0" indent="0">
-                <a:spcBef>
-                  <a:spcPts val="0"/>
-                </a:spcBef>
-                <a:spcAft>
-                  <a:spcPts val="0"/>
-                </a:spcAft>
-              </a:pPr>
-              <a:r>
-                <a:rPr sz="950" i="0" b="0">
-                  <a:solidFill>
-                    <a:srgbClr val="555555">
-                      <a:alpha val="100000"/>
-                    </a:srgbClr>
-                  </a:solidFill>
-                  <a:latin typeface="luciole"/>
-                  <a:cs typeface="luciole"/>
-                </a:rPr>
-                <a:t>  - Métastatique (n = 1)</a:t>
-              </a:r>
-            </a:p>
-          </p:txBody>
-        </p:sp>
-        <p:sp>
-          <p:nvSpPr>
-            <p:cNvPr id="33" name="tx33"/>
-            <p:cNvSpPr/>
-            <p:nvPr/>
-          </p:nvSpPr>
-          <p:spPr>
-            <a:xfrm>
-              <a:off x="6002155" y="4173915"/>
-              <a:ext cx="1408907" cy="92080"/>
-            </a:xfrm>
-            <a:prstGeom prst="rect">
-              <a:avLst/>
-            </a:prstGeom>
-            <a:noFill/>
-          </p:spPr>
-          <p:txBody>
-            <a:bodyPr lIns="0" rIns="0" tIns="0" bIns="0" anchorCtr="1" anchor="ctr" wrap="none"/>
-            <a:lstStyle/>
-            <a:p>
-              <a:pPr algn="l" marL="0" marR="0" indent="0">
-                <a:spcBef>
-                  <a:spcPts val="0"/>
-                </a:spcBef>
-                <a:spcAft>
-                  <a:spcPts val="0"/>
-                </a:spcAft>
-              </a:pPr>
-              <a:r>
-                <a:rPr sz="950" i="0" b="0">
-                  <a:solidFill>
-                    <a:srgbClr val="555555">
-                      <a:alpha val="100000"/>
-                    </a:srgbClr>
-                  </a:solidFill>
-                  <a:latin typeface="luciole"/>
-                  <a:cs typeface="luciole"/>
-                </a:rPr>
-                <a:t>  - Non opérable (n = 1)</a:t>
-              </a:r>
-            </a:p>
-          </p:txBody>
-        </p:sp>
-        <p:sp>
-          <p:nvSpPr>
-            <p:cNvPr id="34" name="tx34"/>
-            <p:cNvSpPr/>
-            <p:nvPr/>
-          </p:nvSpPr>
-          <p:spPr>
-            <a:xfrm>
-              <a:off x="6002155" y="4347651"/>
-              <a:ext cx="1330543" cy="92080"/>
-            </a:xfrm>
-            <a:prstGeom prst="rect">
-              <a:avLst/>
-            </a:prstGeom>
-            <a:noFill/>
-          </p:spPr>
-          <p:txBody>
-            <a:bodyPr lIns="0" rIns="0" tIns="0" bIns="0" anchorCtr="1" anchor="ctr" wrap="none"/>
-            <a:lstStyle/>
-            <a:p>
-              <a:pPr algn="l" marL="0" marR="0" indent="0">
-                <a:spcBef>
-                  <a:spcPts val="0"/>
-                </a:spcBef>
-                <a:spcAft>
-                  <a:spcPts val="0"/>
-                </a:spcAft>
-              </a:pPr>
-              <a:r>
-                <a:rPr sz="950" i="0" b="0">
-                  <a:solidFill>
-                    <a:srgbClr val="555555">
-                      <a:alpha val="100000"/>
-                    </a:srgbClr>
-                  </a:solidFill>
-                  <a:latin typeface="luciole"/>
-                  <a:cs typeface="luciole"/>
-                </a:rPr>
-                <a:t>- CHD Vendée (n = 11)</a:t>
-              </a:r>
-            </a:p>
-          </p:txBody>
-        </p:sp>
-        <p:sp>
-          <p:nvSpPr>
-            <p:cNvPr id="35" name="tx35"/>
-            <p:cNvSpPr/>
-            <p:nvPr/>
-          </p:nvSpPr>
-          <p:spPr>
-            <a:xfrm>
-              <a:off x="6002155" y="4521387"/>
-              <a:ext cx="1417960" cy="92080"/>
-            </a:xfrm>
-            <a:prstGeom prst="rect">
-              <a:avLst/>
-            </a:prstGeom>
-            <a:noFill/>
-          </p:spPr>
-          <p:txBody>
-            <a:bodyPr lIns="0" rIns="0" tIns="0" bIns="0" anchorCtr="1" anchor="ctr" wrap="none"/>
-            <a:lstStyle/>
-            <a:p>
-              <a:pPr algn="l" marL="0" marR="0" indent="0">
-                <a:spcBef>
-                  <a:spcPts val="0"/>
-                </a:spcBef>
-                <a:spcAft>
-                  <a:spcPts val="0"/>
-                </a:spcAft>
-              </a:pPr>
-              <a:r>
-                <a:rPr sz="950" i="0" b="0">
-                  <a:solidFill>
-                    <a:srgbClr val="555555">
-                      <a:alpha val="100000"/>
-                    </a:srgbClr>
-                  </a:solidFill>
-                  <a:latin typeface="luciole"/>
-                  <a:cs typeface="luciole"/>
-                </a:rPr>
-                <a:t>  - Métastatique (n = 4)</a:t>
-              </a:r>
-            </a:p>
-          </p:txBody>
-        </p:sp>
-        <p:sp>
-          <p:nvSpPr>
-            <p:cNvPr id="36" name="tx36"/>
-            <p:cNvSpPr/>
-            <p:nvPr/>
-          </p:nvSpPr>
-          <p:spPr>
-            <a:xfrm>
-              <a:off x="6002155" y="4695123"/>
-              <a:ext cx="1386687" cy="92080"/>
-            </a:xfrm>
-            <a:prstGeom prst="rect">
-              <a:avLst/>
-            </a:prstGeom>
-            <a:noFill/>
-          </p:spPr>
-          <p:txBody>
-            <a:bodyPr lIns="0" rIns="0" tIns="0" bIns="0" anchorCtr="1" anchor="ctr" wrap="none"/>
-            <a:lstStyle/>
-            <a:p>
-              <a:pPr algn="l" marL="0" marR="0" indent="0">
-                <a:spcBef>
-                  <a:spcPts val="0"/>
-                </a:spcBef>
-                <a:spcAft>
-                  <a:spcPts val="0"/>
-                </a:spcAft>
-              </a:pPr>
-              <a:r>
-                <a:rPr sz="950" i="0" b="0">
-                  <a:solidFill>
-                    <a:srgbClr val="555555">
-                      <a:alpha val="100000"/>
-                    </a:srgbClr>
-                  </a:solidFill>
-                  <a:latin typeface="luciole"/>
-                  <a:cs typeface="luciole"/>
-                </a:rPr>
-                <a:t>  - Autre chimio (n = 2)</a:t>
-              </a:r>
-            </a:p>
-          </p:txBody>
-        </p:sp>
-        <p:sp>
-          <p:nvSpPr>
-            <p:cNvPr id="37" name="tx37"/>
-            <p:cNvSpPr/>
-            <p:nvPr/>
-          </p:nvSpPr>
-          <p:spPr>
-            <a:xfrm>
-              <a:off x="6002155" y="4868859"/>
-              <a:ext cx="1477670" cy="92080"/>
-            </a:xfrm>
-            <a:prstGeom prst="rect">
-              <a:avLst/>
-            </a:prstGeom>
-            <a:noFill/>
-          </p:spPr>
-          <p:txBody>
-            <a:bodyPr lIns="0" rIns="0" tIns="0" bIns="0" anchorCtr="1" anchor="ctr" wrap="none"/>
-            <a:lstStyle/>
-            <a:p>
-              <a:pPr algn="l" marL="0" marR="0" indent="0">
-                <a:spcBef>
-                  <a:spcPts val="0"/>
-                </a:spcBef>
-                <a:spcAft>
-                  <a:spcPts val="0"/>
-                </a:spcAft>
-              </a:pPr>
-              <a:r>
-                <a:rPr sz="950" i="0" b="0">
-                  <a:solidFill>
-                    <a:srgbClr val="555555">
-                      <a:alpha val="100000"/>
-                    </a:srgbClr>
-                  </a:solidFill>
-                  <a:latin typeface="luciole"/>
-                  <a:cs typeface="luciole"/>
-                </a:rPr>
-                <a:t>  - Autre anapath (n = 2)</a:t>
-              </a:r>
-            </a:p>
-          </p:txBody>
-        </p:sp>
-        <p:sp>
-          <p:nvSpPr>
-            <p:cNvPr id="38" name="tx38"/>
-            <p:cNvSpPr/>
-            <p:nvPr/>
-          </p:nvSpPr>
-          <p:spPr>
-            <a:xfrm>
-              <a:off x="6002155" y="5042595"/>
-              <a:ext cx="1929566" cy="92080"/>
-            </a:xfrm>
-            <a:prstGeom prst="rect">
-              <a:avLst/>
-            </a:prstGeom>
-            <a:noFill/>
-          </p:spPr>
-          <p:txBody>
-            <a:bodyPr lIns="0" rIns="0" tIns="0" bIns="0" anchorCtr="1" anchor="ctr" wrap="none"/>
-            <a:lstStyle/>
-            <a:p>
-              <a:pPr algn="l" marL="0" marR="0" indent="0">
-                <a:spcBef>
-                  <a:spcPts val="0"/>
-                </a:spcBef>
-                <a:spcAft>
-                  <a:spcPts val="0"/>
-                </a:spcAft>
-              </a:pPr>
-              <a:r>
-                <a:rPr sz="950" i="0" b="0">
-                  <a:solidFill>
-                    <a:srgbClr val="555555">
-                      <a:alpha val="100000"/>
-                    </a:srgbClr>
-                  </a:solidFill>
-                  <a:latin typeface="luciole"/>
-                  <a:cs typeface="luciole"/>
-                </a:rPr>
-                <a:t>  - Décès post-opératoire (n = 2)</a:t>
-              </a:r>
-            </a:p>
-          </p:txBody>
-        </p:sp>
-        <p:sp>
-          <p:nvSpPr>
-            <p:cNvPr id="39" name="tx39"/>
-            <p:cNvSpPr/>
-            <p:nvPr/>
-          </p:nvSpPr>
-          <p:spPr>
-            <a:xfrm>
-              <a:off x="6002155" y="5216331"/>
-              <a:ext cx="949787" cy="92080"/>
-            </a:xfrm>
-            <a:prstGeom prst="rect">
-              <a:avLst/>
-            </a:prstGeom>
-            <a:noFill/>
-          </p:spPr>
-          <p:txBody>
-            <a:bodyPr lIns="0" rIns="0" tIns="0" bIns="0" anchorCtr="1" anchor="ctr" wrap="none"/>
-            <a:lstStyle/>
-            <a:p>
-              <a:pPr algn="l" marL="0" marR="0" indent="0">
-                <a:spcBef>
-                  <a:spcPts val="0"/>
-                </a:spcBef>
-                <a:spcAft>
-                  <a:spcPts val="0"/>
-                </a:spcAft>
-              </a:pPr>
-              <a:r>
-                <a:rPr sz="950" i="0" b="0">
-                  <a:solidFill>
-                    <a:srgbClr val="555555">
-                      <a:alpha val="100000"/>
-                    </a:srgbClr>
-                  </a:solidFill>
-                  <a:latin typeface="luciole"/>
-                  <a:cs typeface="luciole"/>
-                </a:rPr>
-                <a:t>  - Autre (n = 1)</a:t>
-              </a:r>
-            </a:p>
-          </p:txBody>
-        </p:sp>
-        <p:sp>
-          <p:nvSpPr>
-            <p:cNvPr id="40" name="pg40"/>
-            <p:cNvSpPr/>
-            <p:nvPr/>
-          </p:nvSpPr>
-          <p:spPr>
-            <a:xfrm>
-              <a:off x="2806732" y="2757354"/>
+              <a:off x="2806732" y="2071554"/>
               <a:ext cx="1987485" cy="1343291"/>
             </a:xfrm>
             <a:custGeom>
@@ -4243,13 +3428,13 @@
         </p:sp>
         <p:sp>
           <p:nvSpPr>
-            <p:cNvPr id="41" name="tx41"/>
+            <p:cNvPr id="21" name="tx21"/>
             <p:cNvSpPr/>
             <p:nvPr/>
           </p:nvSpPr>
           <p:spPr>
             <a:xfrm>
-              <a:off x="3022732" y="2973354"/>
+              <a:off x="3022732" y="2287554"/>
               <a:ext cx="1106058" cy="106619"/>
             </a:xfrm>
             <a:prstGeom prst="rect">
@@ -4286,13 +3471,13 @@
         </p:sp>
         <p:sp>
           <p:nvSpPr>
-            <p:cNvPr id="42" name="tx42"/>
+            <p:cNvPr id="22" name="tx22"/>
             <p:cNvSpPr/>
             <p:nvPr/>
           </p:nvSpPr>
           <p:spPr>
             <a:xfrm>
-              <a:off x="3022732" y="3174522"/>
+              <a:off x="3022732" y="2488722"/>
               <a:ext cx="1535369" cy="106619"/>
             </a:xfrm>
             <a:prstGeom prst="rect">
@@ -4329,13 +3514,13 @@
         </p:sp>
         <p:sp>
           <p:nvSpPr>
-            <p:cNvPr id="43" name="tx43"/>
+            <p:cNvPr id="23" name="tx23"/>
             <p:cNvSpPr/>
             <p:nvPr/>
           </p:nvSpPr>
           <p:spPr>
             <a:xfrm>
-              <a:off x="3022732" y="3375690"/>
+              <a:off x="3022732" y="2689890"/>
               <a:ext cx="1540306" cy="106619"/>
             </a:xfrm>
             <a:prstGeom prst="rect">
@@ -4372,13 +3557,13 @@
         </p:sp>
         <p:sp>
           <p:nvSpPr>
-            <p:cNvPr id="44" name="tx44"/>
+            <p:cNvPr id="24" name="tx24"/>
             <p:cNvSpPr/>
             <p:nvPr/>
           </p:nvSpPr>
           <p:spPr>
             <a:xfrm>
-              <a:off x="3022732" y="3576858"/>
+              <a:off x="3022732" y="2891058"/>
               <a:ext cx="1555485" cy="106619"/>
             </a:xfrm>
             <a:prstGeom prst="rect">
@@ -4415,13 +3600,13 @@
         </p:sp>
         <p:sp>
           <p:nvSpPr>
-            <p:cNvPr id="45" name="tx45"/>
+            <p:cNvPr id="25" name="tx25"/>
             <p:cNvSpPr/>
             <p:nvPr/>
           </p:nvSpPr>
           <p:spPr>
             <a:xfrm>
-              <a:off x="3022732" y="3778026"/>
+              <a:off x="3022732" y="3092226"/>
               <a:ext cx="1362821" cy="106619"/>
             </a:xfrm>
             <a:prstGeom prst="rect">
@@ -4458,13 +3643,13 @@
         </p:sp>
         <p:sp>
           <p:nvSpPr>
-            <p:cNvPr id="46" name="pg46"/>
+            <p:cNvPr id="26" name="pg26"/>
             <p:cNvSpPr/>
             <p:nvPr/>
           </p:nvSpPr>
           <p:spPr>
             <a:xfrm>
-              <a:off x="4049447" y="5459406"/>
+              <a:off x="1156228" y="4087806"/>
               <a:ext cx="2588155" cy="739787"/>
             </a:xfrm>
             <a:custGeom>
@@ -4645,13 +3830,13 @@
         </p:sp>
         <p:sp>
           <p:nvSpPr>
-            <p:cNvPr id="47" name="tx47"/>
+            <p:cNvPr id="27" name="tx27"/>
             <p:cNvSpPr/>
             <p:nvPr/>
           </p:nvSpPr>
           <p:spPr>
             <a:xfrm>
-              <a:off x="4265447" y="5675406"/>
+              <a:off x="1372228" y="4303806"/>
               <a:ext cx="2156155" cy="106619"/>
             </a:xfrm>
             <a:prstGeom prst="rect">
@@ -4688,13 +3873,13 @@
         </p:sp>
         <p:sp>
           <p:nvSpPr>
-            <p:cNvPr id="48" name="tx48"/>
+            <p:cNvPr id="28" name="tx28"/>
             <p:cNvSpPr/>
             <p:nvPr/>
           </p:nvSpPr>
           <p:spPr>
             <a:xfrm>
-              <a:off x="5069936" y="5876574"/>
+              <a:off x="2176717" y="4504974"/>
               <a:ext cx="547176" cy="106619"/>
             </a:xfrm>
             <a:prstGeom prst="rect">
@@ -4731,13 +3916,13 @@
         </p:sp>
         <p:sp>
           <p:nvSpPr>
-            <p:cNvPr id="49" name="pg49"/>
+            <p:cNvPr id="29" name="pg29"/>
             <p:cNvSpPr/>
             <p:nvPr/>
           </p:nvSpPr>
           <p:spPr>
             <a:xfrm>
-              <a:off x="984515" y="5459406"/>
+              <a:off x="3877734" y="4087806"/>
               <a:ext cx="2545818" cy="739787"/>
             </a:xfrm>
             <a:custGeom>
@@ -4918,13 +4103,13 @@
         </p:sp>
         <p:sp>
           <p:nvSpPr>
-            <p:cNvPr id="50" name="tx50"/>
+            <p:cNvPr id="30" name="tx30"/>
             <p:cNvSpPr/>
             <p:nvPr/>
           </p:nvSpPr>
           <p:spPr>
             <a:xfrm>
-              <a:off x="1200515" y="5675406"/>
+              <a:off x="4093734" y="4303806"/>
               <a:ext cx="2113818" cy="106619"/>
             </a:xfrm>
             <a:prstGeom prst="rect">
@@ -4961,13 +4146,13 @@
         </p:sp>
         <p:sp>
           <p:nvSpPr>
-            <p:cNvPr id="51" name="tx51"/>
+            <p:cNvPr id="31" name="tx31"/>
             <p:cNvSpPr/>
             <p:nvPr/>
           </p:nvSpPr>
           <p:spPr>
             <a:xfrm>
-              <a:off x="1975286" y="5876574"/>
+              <a:off x="4868505" y="4504974"/>
               <a:ext cx="564276" cy="106619"/>
             </a:xfrm>
             <a:prstGeom prst="rect">
@@ -5004,27 +4189,27 @@
         </p:sp>
         <p:sp>
           <p:nvSpPr>
-            <p:cNvPr id="52" name="pl52"/>
+            <p:cNvPr id="32" name="pl32"/>
             <p:cNvSpPr/>
             <p:nvPr/>
           </p:nvSpPr>
           <p:spPr>
             <a:xfrm>
               <a:off x="3800475" y="1256861"/>
-              <a:ext cx="1985680" cy="251898"/>
+              <a:ext cx="1450105" cy="286188"/>
             </a:xfrm>
             <a:custGeom>
               <a:avLst/>
               <a:pathLst>
-                <a:path w="1985680" h="251898">
+                <a:path w="1450105" h="286188">
                   <a:moveTo>
                     <a:pt x="0" y="0"/>
                   </a:moveTo>
                   <a:lnTo>
-                    <a:pt x="0" y="251898"/>
-                  </a:lnTo>
-                  <a:lnTo>
-                    <a:pt x="1985680" y="251898"/>
+                    <a:pt x="0" y="286188"/>
+                  </a:lnTo>
+                  <a:lnTo>
+                    <a:pt x="1450105" y="286188"/>
                   </a:lnTo>
                 </a:path>
               </a:pathLst>
@@ -5047,13 +4232,13 @@
         </p:sp>
         <p:sp>
           <p:nvSpPr>
-            <p:cNvPr id="53" name="pl53"/>
+            <p:cNvPr id="33" name="pl33"/>
             <p:cNvSpPr/>
             <p:nvPr/>
           </p:nvSpPr>
           <p:spPr>
             <a:xfrm>
-              <a:off x="5786155" y="1508759"/>
+              <a:off x="5250580" y="1543049"/>
               <a:ext cx="0" cy="0"/>
             </a:xfrm>
             <a:custGeom>
@@ -5090,24 +4275,24 @@
         </p:sp>
         <p:sp>
           <p:nvSpPr>
-            <p:cNvPr id="54" name="pl54"/>
+            <p:cNvPr id="34" name="pl34"/>
             <p:cNvSpPr/>
             <p:nvPr/>
           </p:nvSpPr>
           <p:spPr>
             <a:xfrm>
               <a:off x="3800475" y="1256861"/>
-              <a:ext cx="0" cy="1500492"/>
+              <a:ext cx="0" cy="814692"/>
             </a:xfrm>
             <a:custGeom>
               <a:avLst/>
               <a:pathLst>
-                <a:path w="0" h="1500492">
+                <a:path w="0" h="814692">
                   <a:moveTo>
                     <a:pt x="0" y="0"/>
                   </a:moveTo>
                   <a:lnTo>
-                    <a:pt x="0" y="1500492"/>
+                    <a:pt x="0" y="814692"/>
                   </a:lnTo>
                 </a:path>
               </a:pathLst>
@@ -5130,13 +4315,13 @@
         </p:sp>
         <p:sp>
           <p:nvSpPr>
-            <p:cNvPr id="55" name="pl55"/>
+            <p:cNvPr id="35" name="pl35"/>
             <p:cNvSpPr/>
             <p:nvPr/>
           </p:nvSpPr>
           <p:spPr>
             <a:xfrm>
-              <a:off x="3800475" y="2757354"/>
+              <a:off x="3800475" y="2071554"/>
               <a:ext cx="0" cy="0"/>
             </a:xfrm>
             <a:custGeom>
@@ -5173,30 +4358,30 @@
         </p:sp>
         <p:sp>
           <p:nvSpPr>
-            <p:cNvPr id="56" name="pl56"/>
+            <p:cNvPr id="36" name="pl36"/>
             <p:cNvSpPr/>
             <p:nvPr/>
           </p:nvSpPr>
           <p:spPr>
             <a:xfrm>
-              <a:off x="3800475" y="4100645"/>
-              <a:ext cx="1543049" cy="1358760"/>
+              <a:off x="2450306" y="3414845"/>
+              <a:ext cx="1350168" cy="672960"/>
             </a:xfrm>
             <a:custGeom>
               <a:avLst/>
               <a:pathLst>
-                <a:path w="1543049" h="1358760">
+                <a:path w="1350168" h="672960">
                   <a:moveTo>
-                    <a:pt x="0" y="0"/>
+                    <a:pt x="1350168" y="0"/>
                   </a:moveTo>
                   <a:lnTo>
-                    <a:pt x="0" y="548540"/>
-                  </a:lnTo>
-                  <a:lnTo>
-                    <a:pt x="1543049" y="548540"/>
-                  </a:lnTo>
-                  <a:lnTo>
-                    <a:pt x="1543049" y="1358760"/>
+                    <a:pt x="1350168" y="243740"/>
+                  </a:lnTo>
+                  <a:lnTo>
+                    <a:pt x="0" y="243740"/>
+                  </a:lnTo>
+                  <a:lnTo>
+                    <a:pt x="0" y="672960"/>
                   </a:lnTo>
                 </a:path>
               </a:pathLst>
@@ -5219,13 +4404,13 @@
         </p:sp>
         <p:sp>
           <p:nvSpPr>
-            <p:cNvPr id="57" name="pl57"/>
+            <p:cNvPr id="37" name="pl37"/>
             <p:cNvSpPr/>
             <p:nvPr/>
           </p:nvSpPr>
           <p:spPr>
             <a:xfrm>
-              <a:off x="5343524" y="5459406"/>
+              <a:off x="2450306" y="4087806"/>
               <a:ext cx="0" cy="0"/>
             </a:xfrm>
             <a:custGeom>
@@ -5262,30 +4447,30 @@
         </p:sp>
         <p:sp>
           <p:nvSpPr>
-            <p:cNvPr id="58" name="pl58"/>
+            <p:cNvPr id="38" name="pl38"/>
             <p:cNvSpPr/>
             <p:nvPr/>
           </p:nvSpPr>
           <p:spPr>
             <a:xfrm>
-              <a:off x="2257425" y="4100645"/>
-              <a:ext cx="1543050" cy="1358760"/>
+              <a:off x="3800475" y="3414845"/>
+              <a:ext cx="1350168" cy="672960"/>
             </a:xfrm>
             <a:custGeom>
               <a:avLst/>
               <a:pathLst>
-                <a:path w="1543050" h="1358760">
+                <a:path w="1350168" h="672960">
                   <a:moveTo>
-                    <a:pt x="1543050" y="0"/>
+                    <a:pt x="0" y="0"/>
                   </a:moveTo>
                   <a:lnTo>
-                    <a:pt x="1543050" y="548540"/>
-                  </a:lnTo>
-                  <a:lnTo>
-                    <a:pt x="0" y="548540"/>
-                  </a:lnTo>
-                  <a:lnTo>
-                    <a:pt x="0" y="1358760"/>
+                    <a:pt x="0" y="243740"/>
+                  </a:lnTo>
+                  <a:lnTo>
+                    <a:pt x="1350168" y="243740"/>
+                  </a:lnTo>
+                  <a:lnTo>
+                    <a:pt x="1350168" y="672960"/>
                   </a:lnTo>
                 </a:path>
               </a:pathLst>
@@ -5308,13 +4493,13 @@
         </p:sp>
         <p:sp>
           <p:nvSpPr>
-            <p:cNvPr id="59" name="pl59"/>
+            <p:cNvPr id="39" name="pl39"/>
             <p:cNvSpPr/>
             <p:nvPr/>
           </p:nvSpPr>
           <p:spPr>
             <a:xfrm>
-              <a:off x="2257425" y="5459406"/>
+              <a:off x="5150643" y="4087806"/>
               <a:ext cx="0" cy="0"/>
             </a:xfrm>
             <a:custGeom>

--- a/output/fig_flowchart.pptx
+++ b/output/fig_flowchart.pptx
@@ -2222,10 +2222,10 @@
         </p:nvGrpSpPr>
         <p:grpSpPr>
           <a:xfrm>
-            <a:off x="714375" y="0"/>
-            <a:ext cx="7715250" cy="6858000"/>
-            <a:chOff x="714375" y="0"/>
-            <a:chExt cx="7715250" cy="6858000"/>
+            <a:off x="0" y="248478"/>
+            <a:ext cx="9144000" cy="6361043"/>
+            <a:chOff x="0" y="248478"/>
+            <a:chExt cx="9144000" cy="6361043"/>
           </a:xfrm>
         </p:grpSpPr>
         <p:sp>
@@ -2236,8 +2236,8 @@
           </p:nvSpPr>
           <p:spPr>
             <a:xfrm>
-              <a:off x="714375" y="0"/>
-              <a:ext cx="7715250" cy="6858000"/>
+              <a:off x="0" y="248478"/>
+              <a:ext cx="9144000" cy="6361043"/>
             </a:xfrm>
             <a:prstGeom prst="rect">
               <a:avLst/>
@@ -2271,7 +2271,7 @@
           </p:nvSpPr>
           <p:spPr>
             <a:xfrm>
-              <a:off x="2437314" y="114738"/>
+              <a:off x="2294439" y="313521"/>
               <a:ext cx="2726321" cy="1142123"/>
             </a:xfrm>
             <a:custGeom>
@@ -2458,8 +2458,8 @@
           </p:nvSpPr>
           <p:spPr>
             <a:xfrm>
-              <a:off x="2653314" y="330738"/>
-              <a:ext cx="1851934" cy="106619"/>
+              <a:off x="2510439" y="529521"/>
+              <a:ext cx="1856780" cy="106619"/>
             </a:xfrm>
             <a:prstGeom prst="rect">
               <a:avLst/>
@@ -2485,10 +2485,10 @@
                       <a:alpha val="100000"/>
                     </a:srgbClr>
                   </a:solidFill>
-                  <a:latin typeface="luciole"/>
-                  <a:cs typeface="luciole"/>
+                  <a:latin typeface="Luciole"/>
+                  <a:cs typeface="Luciole"/>
                 </a:rPr>
-                <a:t>Patients éligibles (N = 337)</a:t>
+                <a:t>Patients éligibles (N = 333)</a:t>
               </a:r>
             </a:p>
           </p:txBody>
@@ -2501,7 +2501,7 @@
           </p:nvSpPr>
           <p:spPr>
             <a:xfrm>
-              <a:off x="2653314" y="531906"/>
+              <a:off x="2510439" y="730689"/>
               <a:ext cx="2244211" cy="106619"/>
             </a:xfrm>
             <a:prstGeom prst="rect">
@@ -2528,8 +2528,8 @@
                       <a:alpha val="100000"/>
                     </a:srgbClr>
                   </a:solidFill>
-                  <a:latin typeface="luciole"/>
-                  <a:cs typeface="luciole"/>
+                  <a:latin typeface="Luciole"/>
+                  <a:cs typeface="Luciole"/>
                 </a:rPr>
                 <a:t>- Hommes et femmes &gt;= 18 ans</a:t>
               </a:r>
@@ -2544,7 +2544,7 @@
           </p:nvSpPr>
           <p:spPr>
             <a:xfrm>
-              <a:off x="2653314" y="733074"/>
+              <a:off x="2510439" y="931857"/>
               <a:ext cx="2294321" cy="106619"/>
             </a:xfrm>
             <a:prstGeom prst="rect">
@@ -2571,8 +2571,8 @@
                       <a:alpha val="100000"/>
                     </a:srgbClr>
                   </a:solidFill>
-                  <a:latin typeface="luciole"/>
-                  <a:cs typeface="luciole"/>
+                  <a:latin typeface="Luciole"/>
+                  <a:cs typeface="Luciole"/>
                 </a:rPr>
                 <a:t>- Opérés d'un cancer du pancréas</a:t>
               </a:r>
@@ -2587,7 +2587,7 @@
           </p:nvSpPr>
           <p:spPr>
             <a:xfrm>
-              <a:off x="2653314" y="934242"/>
+              <a:off x="2510439" y="1133025"/>
               <a:ext cx="1903140" cy="106619"/>
             </a:xfrm>
             <a:prstGeom prst="rect">
@@ -2614,8 +2614,8 @@
                       <a:alpha val="100000"/>
                     </a:srgbClr>
                   </a:solidFill>
-                  <a:latin typeface="luciole"/>
-                  <a:cs typeface="luciole"/>
+                  <a:latin typeface="Luciole"/>
+                  <a:cs typeface="Luciole"/>
                 </a:rPr>
                 <a:t>- Entre 01/2022 et 12/2025</a:t>
               </a:r>
@@ -2630,84 +2630,84 @@
           </p:nvSpPr>
           <p:spPr>
             <a:xfrm>
-              <a:off x="5250580" y="499197"/>
-              <a:ext cx="2500464" cy="2087704"/>
+              <a:off x="4633749" y="1078748"/>
+              <a:ext cx="4448502" cy="1392760"/>
             </a:xfrm>
             <a:custGeom>
               <a:avLst/>
               <a:pathLst>
-                <a:path w="2500464" h="2087704">
+                <a:path w="4448502" h="1392760">
                   <a:moveTo>
-                    <a:pt x="63262" y="2087704"/>
+                    <a:pt x="63262" y="1392760"/>
                   </a:moveTo>
                   <a:lnTo>
-                    <a:pt x="2437201" y="2087704"/>
-                  </a:lnTo>
-                  <a:lnTo>
-                    <a:pt x="2434654" y="2087652"/>
-                  </a:lnTo>
-                  <a:lnTo>
-                    <a:pt x="2444826" y="2087242"/>
-                  </a:lnTo>
-                  <a:lnTo>
-                    <a:pt x="2454802" y="2085206"/>
-                  </a:lnTo>
-                  <a:lnTo>
-                    <a:pt x="2464321" y="2081596"/>
-                  </a:lnTo>
-                  <a:lnTo>
-                    <a:pt x="2473138" y="2076505"/>
-                  </a:lnTo>
-                  <a:lnTo>
-                    <a:pt x="2481025" y="2070066"/>
-                  </a:lnTo>
-                  <a:lnTo>
-                    <a:pt x="2487776" y="2062445"/>
-                  </a:lnTo>
-                  <a:lnTo>
-                    <a:pt x="2493217" y="2053840"/>
-                  </a:lnTo>
-                  <a:lnTo>
-                    <a:pt x="2497208" y="2044474"/>
-                  </a:lnTo>
-                  <a:lnTo>
-                    <a:pt x="2499645" y="2034589"/>
-                  </a:lnTo>
-                  <a:lnTo>
-                    <a:pt x="2500464" y="2024441"/>
-                  </a:lnTo>
-                  <a:lnTo>
-                    <a:pt x="2500464" y="63262"/>
-                  </a:lnTo>
-                  <a:lnTo>
-                    <a:pt x="2499645" y="53114"/>
-                  </a:lnTo>
-                  <a:lnTo>
-                    <a:pt x="2497208" y="43229"/>
-                  </a:lnTo>
-                  <a:lnTo>
-                    <a:pt x="2493217" y="33863"/>
-                  </a:lnTo>
-                  <a:lnTo>
-                    <a:pt x="2487776" y="25258"/>
-                  </a:lnTo>
-                  <a:lnTo>
-                    <a:pt x="2481025" y="17637"/>
-                  </a:lnTo>
-                  <a:lnTo>
-                    <a:pt x="2473138" y="11198"/>
-                  </a:lnTo>
-                  <a:lnTo>
-                    <a:pt x="2464321" y="6107"/>
-                  </a:lnTo>
-                  <a:lnTo>
-                    <a:pt x="2454802" y="2497"/>
-                  </a:lnTo>
-                  <a:lnTo>
-                    <a:pt x="2444826" y="461"/>
-                  </a:lnTo>
-                  <a:lnTo>
-                    <a:pt x="2437201" y="0"/>
+                    <a:pt x="4385239" y="1392760"/>
+                  </a:lnTo>
+                  <a:lnTo>
+                    <a:pt x="4382691" y="1392708"/>
+                  </a:lnTo>
+                  <a:lnTo>
+                    <a:pt x="4392864" y="1392298"/>
+                  </a:lnTo>
+                  <a:lnTo>
+                    <a:pt x="4402840" y="1390262"/>
+                  </a:lnTo>
+                  <a:lnTo>
+                    <a:pt x="4412359" y="1386652"/>
+                  </a:lnTo>
+                  <a:lnTo>
+                    <a:pt x="4421176" y="1381561"/>
+                  </a:lnTo>
+                  <a:lnTo>
+                    <a:pt x="4429062" y="1375122"/>
+                  </a:lnTo>
+                  <a:lnTo>
+                    <a:pt x="4435814" y="1367501"/>
+                  </a:lnTo>
+                  <a:lnTo>
+                    <a:pt x="4441255" y="1358896"/>
+                  </a:lnTo>
+                  <a:lnTo>
+                    <a:pt x="4445246" y="1349530"/>
+                  </a:lnTo>
+                  <a:lnTo>
+                    <a:pt x="4447682" y="1339645"/>
+                  </a:lnTo>
+                  <a:lnTo>
+                    <a:pt x="4448502" y="1329497"/>
+                  </a:lnTo>
+                  <a:lnTo>
+                    <a:pt x="4448502" y="63262"/>
+                  </a:lnTo>
+                  <a:lnTo>
+                    <a:pt x="4447682" y="53114"/>
+                  </a:lnTo>
+                  <a:lnTo>
+                    <a:pt x="4445246" y="43229"/>
+                  </a:lnTo>
+                  <a:lnTo>
+                    <a:pt x="4441255" y="33863"/>
+                  </a:lnTo>
+                  <a:lnTo>
+                    <a:pt x="4435814" y="25258"/>
+                  </a:lnTo>
+                  <a:lnTo>
+                    <a:pt x="4429062" y="17637"/>
+                  </a:lnTo>
+                  <a:lnTo>
+                    <a:pt x="4421176" y="11198"/>
+                  </a:lnTo>
+                  <a:lnTo>
+                    <a:pt x="4412359" y="6107"/>
+                  </a:lnTo>
+                  <a:lnTo>
+                    <a:pt x="4402840" y="2497"/>
+                  </a:lnTo>
+                  <a:lnTo>
+                    <a:pt x="4392864" y="461"/>
+                  </a:lnTo>
+                  <a:lnTo>
+                    <a:pt x="4385239" y="0"/>
                   </a:lnTo>
                   <a:lnTo>
                     <a:pt x="63262" y="0"/>
@@ -2749,40 +2749,40 @@
                     <a:pt x="0" y="63262"/>
                   </a:lnTo>
                   <a:lnTo>
-                    <a:pt x="0" y="2024441"/>
-                  </a:lnTo>
-                  <a:lnTo>
-                    <a:pt x="205" y="2019350"/>
-                  </a:lnTo>
-                  <a:lnTo>
-                    <a:pt x="205" y="2029531"/>
-                  </a:lnTo>
-                  <a:lnTo>
-                    <a:pt x="1838" y="2039581"/>
-                  </a:lnTo>
-                  <a:lnTo>
-                    <a:pt x="5062" y="2049238"/>
-                  </a:lnTo>
-                  <a:lnTo>
-                    <a:pt x="9793" y="2058253"/>
-                  </a:lnTo>
-                  <a:lnTo>
-                    <a:pt x="15909" y="2066392"/>
-                  </a:lnTo>
-                  <a:lnTo>
-                    <a:pt x="23252" y="2073444"/>
-                  </a:lnTo>
-                  <a:lnTo>
-                    <a:pt x="31631" y="2079228"/>
-                  </a:lnTo>
-                  <a:lnTo>
-                    <a:pt x="40829" y="2083593"/>
-                  </a:lnTo>
-                  <a:lnTo>
-                    <a:pt x="50608" y="2086425"/>
-                  </a:lnTo>
-                  <a:lnTo>
-                    <a:pt x="60715" y="2087652"/>
+                    <a:pt x="0" y="1329497"/>
+                  </a:lnTo>
+                  <a:lnTo>
+                    <a:pt x="205" y="1324406"/>
+                  </a:lnTo>
+                  <a:lnTo>
+                    <a:pt x="205" y="1334587"/>
+                  </a:lnTo>
+                  <a:lnTo>
+                    <a:pt x="1838" y="1344637"/>
+                  </a:lnTo>
+                  <a:lnTo>
+                    <a:pt x="5062" y="1354294"/>
+                  </a:lnTo>
+                  <a:lnTo>
+                    <a:pt x="9793" y="1363309"/>
+                  </a:lnTo>
+                  <a:lnTo>
+                    <a:pt x="15909" y="1371448"/>
+                  </a:lnTo>
+                  <a:lnTo>
+                    <a:pt x="23252" y="1378500"/>
+                  </a:lnTo>
+                  <a:lnTo>
+                    <a:pt x="31631" y="1384284"/>
+                  </a:lnTo>
+                  <a:lnTo>
+                    <a:pt x="40829" y="1388649"/>
+                  </a:lnTo>
+                  <a:lnTo>
+                    <a:pt x="50608" y="1391481"/>
+                  </a:lnTo>
+                  <a:lnTo>
+                    <a:pt x="60715" y="1392708"/>
                   </a:lnTo>
                   <a:close/>
                 </a:path>
@@ -2817,8 +2817,8 @@
           </p:nvSpPr>
           <p:spPr>
             <a:xfrm>
-              <a:off x="5466580" y="715197"/>
-              <a:ext cx="954084" cy="92080"/>
+              <a:off x="4849748" y="1294748"/>
+              <a:ext cx="958931" cy="92080"/>
             </a:xfrm>
             <a:prstGeom prst="rect">
               <a:avLst/>
@@ -2844,10 +2844,10 @@
                       <a:alpha val="100000"/>
                     </a:srgbClr>
                   </a:solidFill>
-                  <a:latin typeface="luciole"/>
-                  <a:cs typeface="luciole"/>
+                  <a:latin typeface="Luciole"/>
+                  <a:cs typeface="Luciole"/>
                 </a:rPr>
-                <a:t>Exclus (n = 234)</a:t>
+                <a:t>Exclus (n = 230)</a:t>
               </a:r>
             </a:p>
           </p:txBody>
@@ -2860,8 +2860,8 @@
           </p:nvSpPr>
           <p:spPr>
             <a:xfrm>
-              <a:off x="5466580" y="888933"/>
-              <a:ext cx="1481236" cy="92080"/>
+              <a:off x="4849748" y="1468484"/>
+              <a:ext cx="2911175" cy="92080"/>
             </a:xfrm>
             <a:prstGeom prst="rect">
               <a:avLst/>
@@ -2887,10 +2887,10 @@
                       <a:alpha val="100000"/>
                     </a:srgbClr>
                   </a:solidFill>
-                  <a:latin typeface="luciole"/>
-                  <a:cs typeface="luciole"/>
+                  <a:latin typeface="Luciole"/>
+                  <a:cs typeface="Luciole"/>
                 </a:rPr>
-                <a:t>- Autre anapath (n = 84)</a:t>
+                <a:t>- autre diagnostic anatomopathologique (n = 85)</a:t>
               </a:r>
             </a:p>
           </p:txBody>
@@ -2903,8 +2903,8 @@
           </p:nvSpPr>
           <p:spPr>
             <a:xfrm>
-              <a:off x="5466580" y="1062669"/>
-              <a:ext cx="1405158" cy="92080"/>
+              <a:off x="4849748" y="1642220"/>
+              <a:ext cx="3338382" cy="92080"/>
             </a:xfrm>
             <a:prstGeom prst="rect">
               <a:avLst/>
@@ -2930,10 +2930,10 @@
                       <a:alpha val="100000"/>
                     </a:srgbClr>
                   </a:solidFill>
-                  <a:latin typeface="luciole"/>
-                  <a:cs typeface="luciole"/>
+                  <a:latin typeface="Luciole"/>
+                  <a:cs typeface="Luciole"/>
                 </a:rPr>
-                <a:t>- Non opérable (n = 43)</a:t>
+                <a:t>- lésion non opérable ou d'emblée métastatique (n = 77)</a:t>
               </a:r>
             </a:p>
           </p:txBody>
@@ -2946,8 +2946,8 @@
           </p:nvSpPr>
           <p:spPr>
             <a:xfrm>
-              <a:off x="5466580" y="1236405"/>
-              <a:ext cx="1403238" cy="92080"/>
+              <a:off x="4849748" y="1815956"/>
+              <a:ext cx="1870953" cy="92080"/>
             </a:xfrm>
             <a:prstGeom prst="rect">
               <a:avLst/>
@@ -2973,10 +2973,10 @@
                       <a:alpha val="100000"/>
                     </a:srgbClr>
                   </a:solidFill>
-                  <a:latin typeface="luciole"/>
-                  <a:cs typeface="luciole"/>
+                  <a:latin typeface="Luciole"/>
+                  <a:cs typeface="Luciole"/>
                 </a:rPr>
-                <a:t>- Métastatique (n = 38)</a:t>
+                <a:t>- données manquantes (n = 41)</a:t>
               </a:r>
             </a:p>
           </p:txBody>
@@ -2989,8 +2989,8 @@
           </p:nvSpPr>
           <p:spPr>
             <a:xfrm>
-              <a:off x="5466580" y="1410141"/>
-              <a:ext cx="1491752" cy="92080"/>
+              <a:off x="4849749" y="1989692"/>
+              <a:ext cx="2833817" cy="92080"/>
             </a:xfrm>
             <a:prstGeom prst="rect">
               <a:avLst/>
@@ -3016,10 +3016,10 @@
                       <a:alpha val="100000"/>
                     </a:srgbClr>
                   </a:solidFill>
-                  <a:latin typeface="luciole"/>
-                  <a:cs typeface="luciole"/>
+                  <a:latin typeface="Luciole"/>
+                  <a:cs typeface="Luciole"/>
                 </a:rPr>
-                <a:t>- Chimio ailleurs (n = 36)</a:t>
+                <a:t>- protocole différent de chimiothérapie (n = 16)</a:t>
               </a:r>
             </a:p>
           </p:txBody>
@@ -3032,8 +3032,8 @@
           </p:nvSpPr>
           <p:spPr>
             <a:xfrm>
-              <a:off x="5466580" y="1583877"/>
-              <a:ext cx="1367759" cy="92080"/>
+              <a:off x="4849749" y="2163428"/>
+              <a:ext cx="4016502" cy="92080"/>
             </a:xfrm>
             <a:prstGeom prst="rect">
               <a:avLst/>
@@ -3059,195 +3059,23 @@
                       <a:alpha val="100000"/>
                     </a:srgbClr>
                   </a:solidFill>
-                  <a:latin typeface="luciole"/>
-                  <a:cs typeface="luciole"/>
+                  <a:latin typeface="Luciole"/>
+                  <a:cs typeface="Luciole"/>
                 </a:rPr>
-                <a:t>- Autre chimio (n = 15)</a:t>
+                <a:t>- décès précoce suivant le diagnostic ou en post-opératoire (n = 11)</a:t>
               </a:r>
             </a:p>
           </p:txBody>
         </p:sp>
         <p:sp>
           <p:nvSpPr>
-            <p:cNvPr id="16" name="tx16"/>
+            <p:cNvPr id="16" name="pg16"/>
             <p:cNvSpPr/>
             <p:nvPr/>
           </p:nvSpPr>
           <p:spPr>
             <a:xfrm>
-              <a:off x="5466580" y="1757613"/>
-              <a:ext cx="947044" cy="92080"/>
-            </a:xfrm>
-            <a:prstGeom prst="rect">
-              <a:avLst/>
-            </a:prstGeom>
-            <a:noFill/>
-          </p:spPr>
-          <p:txBody>
-            <a:bodyPr lIns="0" rIns="0" tIns="0" bIns="0" anchorCtr="1" anchor="ctr" wrap="none"/>
-            <a:lstStyle/>
-            <a:p>
-              <a:pPr algn="l" marL="0" marR="0" indent="0">
-                <a:spcBef>
-                  <a:spcPts val="0"/>
-                </a:spcBef>
-                <a:spcAft>
-                  <a:spcPts val="0"/>
-                </a:spcAft>
-              </a:pPr>
-              <a:r>
-                <a:rPr sz="950" i="0" b="0">
-                  <a:solidFill>
-                    <a:srgbClr val="555555">
-                      <a:alpha val="100000"/>
-                    </a:srgbClr>
-                  </a:solidFill>
-                  <a:latin typeface="luciole"/>
-                  <a:cs typeface="luciole"/>
-                </a:rPr>
-                <a:t>- Autre (n = 10)</a:t>
-              </a:r>
-            </a:p>
-          </p:txBody>
-        </p:sp>
-        <p:sp>
-          <p:nvSpPr>
-            <p:cNvPr id="17" name="tx17"/>
-            <p:cNvSpPr/>
-            <p:nvPr/>
-          </p:nvSpPr>
-          <p:spPr>
-            <a:xfrm>
-              <a:off x="5466580" y="1931349"/>
-              <a:ext cx="1851842" cy="92080"/>
-            </a:xfrm>
-            <a:prstGeom prst="rect">
-              <a:avLst/>
-            </a:prstGeom>
-            <a:noFill/>
-          </p:spPr>
-          <p:txBody>
-            <a:bodyPr lIns="0" rIns="0" tIns="0" bIns="0" anchorCtr="1" anchor="ctr" wrap="none"/>
-            <a:lstStyle/>
-            <a:p>
-              <a:pPr algn="l" marL="0" marR="0" indent="0">
-                <a:spcBef>
-                  <a:spcPts val="0"/>
-                </a:spcBef>
-                <a:spcAft>
-                  <a:spcPts val="0"/>
-                </a:spcAft>
-              </a:pPr>
-              <a:r>
-                <a:rPr sz="950" i="0" b="0">
-                  <a:solidFill>
-                    <a:srgbClr val="555555">
-                      <a:alpha val="100000"/>
-                    </a:srgbClr>
-                  </a:solidFill>
-                  <a:latin typeface="luciole"/>
-                  <a:cs typeface="luciole"/>
-                </a:rPr>
-                <a:t>- Décès post-opératoire (n = 4)</a:t>
-              </a:r>
-            </a:p>
-          </p:txBody>
-        </p:sp>
-        <p:sp>
-          <p:nvSpPr>
-            <p:cNvPr id="18" name="tx18"/>
-            <p:cNvSpPr/>
-            <p:nvPr/>
-          </p:nvSpPr>
-          <p:spPr>
-            <a:xfrm>
-              <a:off x="5466580" y="2105085"/>
-              <a:ext cx="2068464" cy="92080"/>
-            </a:xfrm>
-            <a:prstGeom prst="rect">
-              <a:avLst/>
-            </a:prstGeom>
-            <a:noFill/>
-          </p:spPr>
-          <p:txBody>
-            <a:bodyPr lIns="0" rIns="0" tIns="0" bIns="0" anchorCtr="1" anchor="ctr" wrap="none"/>
-            <a:lstStyle/>
-            <a:p>
-              <a:pPr algn="l" marL="0" marR="0" indent="0">
-                <a:spcBef>
-                  <a:spcPts val="0"/>
-                </a:spcBef>
-                <a:spcAft>
-                  <a:spcPts val="0"/>
-                </a:spcAft>
-              </a:pPr>
-              <a:r>
-                <a:rPr sz="950" i="0" b="0">
-                  <a:solidFill>
-                    <a:srgbClr val="555555">
-                      <a:alpha val="100000"/>
-                    </a:srgbClr>
-                  </a:solidFill>
-                  <a:latin typeface="luciole"/>
-                  <a:cs typeface="luciole"/>
-                </a:rPr>
-                <a:t>- Décès précoce après le dg (n = 3)</a:t>
-              </a:r>
-            </a:p>
-          </p:txBody>
-        </p:sp>
-        <p:sp>
-          <p:nvSpPr>
-            <p:cNvPr id="19" name="tx19"/>
-            <p:cNvSpPr/>
-            <p:nvPr/>
-          </p:nvSpPr>
-          <p:spPr>
-            <a:xfrm>
-              <a:off x="5466580" y="2278821"/>
-              <a:ext cx="612556" cy="92080"/>
-            </a:xfrm>
-            <a:prstGeom prst="rect">
-              <a:avLst/>
-            </a:prstGeom>
-            <a:noFill/>
-          </p:spPr>
-          <p:txBody>
-            <a:bodyPr lIns="0" rIns="0" tIns="0" bIns="0" anchorCtr="1" anchor="ctr" wrap="none"/>
-            <a:lstStyle/>
-            <a:p>
-              <a:pPr algn="l" marL="0" marR="0" indent="0">
-                <a:spcBef>
-                  <a:spcPts val="0"/>
-                </a:spcBef>
-                <a:spcAft>
-                  <a:spcPts val="0"/>
-                </a:spcAft>
-              </a:pPr>
-              <a:r>
-                <a:rPr sz="950" i="0" b="0">
-                  <a:solidFill>
-                    <a:srgbClr val="555555">
-                      <a:alpha val="100000"/>
-                    </a:srgbClr>
-                  </a:solidFill>
-                  <a:latin typeface="luciole"/>
-                  <a:cs typeface="luciole"/>
-                </a:rPr>
-                <a:t>- 9 (n = 1)</a:t>
-              </a:r>
-            </a:p>
-          </p:txBody>
-        </p:sp>
-        <p:sp>
-          <p:nvSpPr>
-            <p:cNvPr id="20" name="pg20"/>
-            <p:cNvSpPr/>
-            <p:nvPr/>
-          </p:nvSpPr>
-          <p:spPr>
-            <a:xfrm>
-              <a:off x="2806732" y="2071554"/>
+              <a:off x="2663857" y="2121250"/>
               <a:ext cx="1987485" cy="1343291"/>
             </a:xfrm>
             <a:custGeom>
@@ -3428,13 +3256,13 @@
         </p:sp>
         <p:sp>
           <p:nvSpPr>
-            <p:cNvPr id="21" name="tx21"/>
+            <p:cNvPr id="17" name="tx17"/>
             <p:cNvSpPr/>
             <p:nvPr/>
           </p:nvSpPr>
           <p:spPr>
             <a:xfrm>
-              <a:off x="3022732" y="2287554"/>
+              <a:off x="2879857" y="2337250"/>
               <a:ext cx="1106058" cy="106619"/>
             </a:xfrm>
             <a:prstGeom prst="rect">
@@ -3461,8 +3289,8 @@
                       <a:alpha val="100000"/>
                     </a:srgbClr>
                   </a:solidFill>
-                  <a:latin typeface="luciole"/>
-                  <a:cs typeface="luciole"/>
+                  <a:latin typeface="Luciole"/>
+                  <a:cs typeface="Luciole"/>
                 </a:rPr>
                 <a:t>Inclus (n = 103)</a:t>
               </a:r>
@@ -3471,13 +3299,13 @@
         </p:sp>
         <p:sp>
           <p:nvSpPr>
-            <p:cNvPr id="22" name="tx22"/>
+            <p:cNvPr id="18" name="tx18"/>
             <p:cNvSpPr/>
             <p:nvPr/>
           </p:nvSpPr>
           <p:spPr>
             <a:xfrm>
-              <a:off x="3022732" y="2488722"/>
+              <a:off x="2879857" y="2538418"/>
               <a:ext cx="1535369" cy="106619"/>
             </a:xfrm>
             <a:prstGeom prst="rect">
@@ -3504,8 +3332,8 @@
                       <a:alpha val="100000"/>
                     </a:srgbClr>
                   </a:solidFill>
-                  <a:latin typeface="luciole"/>
-                  <a:cs typeface="luciole"/>
+                  <a:latin typeface="Luciole"/>
+                  <a:cs typeface="Luciole"/>
                 </a:rPr>
                 <a:t>- CHU Angers (n = 36)</a:t>
               </a:r>
@@ -3514,13 +3342,13 @@
         </p:sp>
         <p:sp>
           <p:nvSpPr>
-            <p:cNvPr id="23" name="tx23"/>
+            <p:cNvPr id="19" name="tx19"/>
             <p:cNvSpPr/>
             <p:nvPr/>
           </p:nvSpPr>
           <p:spPr>
             <a:xfrm>
-              <a:off x="3022732" y="2689890"/>
+              <a:off x="2879857" y="2739586"/>
               <a:ext cx="1540306" cy="106619"/>
             </a:xfrm>
             <a:prstGeom prst="rect">
@@ -3547,8 +3375,8 @@
                       <a:alpha val="100000"/>
                     </a:srgbClr>
                   </a:solidFill>
-                  <a:latin typeface="luciole"/>
-                  <a:cs typeface="luciole"/>
+                  <a:latin typeface="Luciole"/>
+                  <a:cs typeface="Luciole"/>
                 </a:rPr>
                 <a:t>- CHU Nantes (n = 25)</a:t>
               </a:r>
@@ -3557,13 +3385,13 @@
         </p:sp>
         <p:sp>
           <p:nvSpPr>
-            <p:cNvPr id="24" name="tx24"/>
+            <p:cNvPr id="20" name="tx20"/>
             <p:cNvSpPr/>
             <p:nvPr/>
           </p:nvSpPr>
           <p:spPr>
             <a:xfrm>
-              <a:off x="3022732" y="2891058"/>
+              <a:off x="2879857" y="2940754"/>
               <a:ext cx="1555485" cy="106619"/>
             </a:xfrm>
             <a:prstGeom prst="rect">
@@ -3590,8 +3418,8 @@
                       <a:alpha val="100000"/>
                     </a:srgbClr>
                   </a:solidFill>
-                  <a:latin typeface="luciole"/>
-                  <a:cs typeface="luciole"/>
+                  <a:latin typeface="Luciole"/>
+                  <a:cs typeface="Luciole"/>
                 </a:rPr>
                 <a:t>- CHD Vendée (n = 25)</a:t>
               </a:r>
@@ -3600,13 +3428,13 @@
         </p:sp>
         <p:sp>
           <p:nvSpPr>
-            <p:cNvPr id="25" name="tx25"/>
+            <p:cNvPr id="21" name="tx21"/>
             <p:cNvSpPr/>
             <p:nvPr/>
           </p:nvSpPr>
           <p:spPr>
             <a:xfrm>
-              <a:off x="3022732" y="3092226"/>
+              <a:off x="2879857" y="3141922"/>
               <a:ext cx="1362821" cy="106619"/>
             </a:xfrm>
             <a:prstGeom prst="rect">
@@ -3633,8 +3461,8 @@
                       <a:alpha val="100000"/>
                     </a:srgbClr>
                   </a:solidFill>
-                  <a:latin typeface="luciole"/>
-                  <a:cs typeface="luciole"/>
+                  <a:latin typeface="Luciole"/>
+                  <a:cs typeface="Luciole"/>
                 </a:rPr>
                 <a:t>- CHU Lyon (n = 17)</a:t>
               </a:r>
@@ -3643,13 +3471,13 @@
         </p:sp>
         <p:sp>
           <p:nvSpPr>
-            <p:cNvPr id="26" name="pg26"/>
+            <p:cNvPr id="22" name="pg22"/>
             <p:cNvSpPr/>
             <p:nvPr/>
           </p:nvSpPr>
           <p:spPr>
             <a:xfrm>
-              <a:off x="1156228" y="4087806"/>
+              <a:off x="991922" y="4013263"/>
               <a:ext cx="2588155" cy="739787"/>
             </a:xfrm>
             <a:custGeom>
@@ -3830,13 +3658,13 @@
         </p:sp>
         <p:sp>
           <p:nvSpPr>
-            <p:cNvPr id="27" name="tx27"/>
+            <p:cNvPr id="23" name="tx23"/>
             <p:cNvSpPr/>
             <p:nvPr/>
           </p:nvSpPr>
           <p:spPr>
             <a:xfrm>
-              <a:off x="1372228" y="4303806"/>
+              <a:off x="1207922" y="4229263"/>
               <a:ext cx="2156155" cy="106619"/>
             </a:xfrm>
             <a:prstGeom prst="rect">
@@ -3863,8 +3691,8 @@
                       <a:alpha val="100000"/>
                     </a:srgbClr>
                   </a:solidFill>
-                  <a:latin typeface="luciole"/>
-                  <a:cs typeface="luciole"/>
+                  <a:latin typeface="Luciole"/>
+                  <a:cs typeface="Luciole"/>
                 </a:rPr>
                 <a:t>Chimiothérapie adjuvante seule</a:t>
               </a:r>
@@ -3873,13 +3701,13 @@
         </p:sp>
         <p:sp>
           <p:nvSpPr>
-            <p:cNvPr id="28" name="tx28"/>
+            <p:cNvPr id="24" name="tx24"/>
             <p:cNvSpPr/>
             <p:nvPr/>
           </p:nvSpPr>
           <p:spPr>
             <a:xfrm>
-              <a:off x="2176717" y="4504974"/>
+              <a:off x="2012411" y="4430431"/>
               <a:ext cx="547176" cy="106619"/>
             </a:xfrm>
             <a:prstGeom prst="rect">
@@ -3906,8 +3734,8 @@
                       <a:alpha val="100000"/>
                     </a:srgbClr>
                   </a:solidFill>
-                  <a:latin typeface="luciole"/>
-                  <a:cs typeface="luciole"/>
+                  <a:latin typeface="Luciole"/>
+                  <a:cs typeface="Luciole"/>
                 </a:rPr>
                 <a:t>(n = 53)</a:t>
               </a:r>
@@ -3916,13 +3744,13 @@
         </p:sp>
         <p:sp>
           <p:nvSpPr>
-            <p:cNvPr id="29" name="pg29"/>
+            <p:cNvPr id="25" name="pg25"/>
             <p:cNvSpPr/>
             <p:nvPr/>
           </p:nvSpPr>
           <p:spPr>
             <a:xfrm>
-              <a:off x="3877734" y="4087806"/>
+              <a:off x="3756290" y="4013263"/>
               <a:ext cx="2545818" cy="739787"/>
             </a:xfrm>
             <a:custGeom>
@@ -4103,13 +3931,13 @@
         </p:sp>
         <p:sp>
           <p:nvSpPr>
-            <p:cNvPr id="30" name="tx30"/>
+            <p:cNvPr id="26" name="tx26"/>
             <p:cNvSpPr/>
             <p:nvPr/>
           </p:nvSpPr>
           <p:spPr>
             <a:xfrm>
-              <a:off x="4093734" y="4303806"/>
+              <a:off x="3972290" y="4229263"/>
               <a:ext cx="2113818" cy="106619"/>
             </a:xfrm>
             <a:prstGeom prst="rect">
@@ -4136,8 +3964,8 @@
                       <a:alpha val="100000"/>
                     </a:srgbClr>
                   </a:solidFill>
-                  <a:latin typeface="luciole"/>
-                  <a:cs typeface="luciole"/>
+                  <a:latin typeface="Luciole"/>
+                  <a:cs typeface="Luciole"/>
                 </a:rPr>
                 <a:t>Chimiothérapie péri-opératoire</a:t>
               </a:r>
@@ -4146,13 +3974,13 @@
         </p:sp>
         <p:sp>
           <p:nvSpPr>
-            <p:cNvPr id="31" name="tx31"/>
+            <p:cNvPr id="27" name="tx27"/>
             <p:cNvSpPr/>
             <p:nvPr/>
           </p:nvSpPr>
           <p:spPr>
             <a:xfrm>
-              <a:off x="4868505" y="4504974"/>
+              <a:off x="4747061" y="4430431"/>
               <a:ext cx="564276" cy="106619"/>
             </a:xfrm>
             <a:prstGeom prst="rect">
@@ -4179,8 +4007,8 @@
                       <a:alpha val="100000"/>
                     </a:srgbClr>
                   </a:solidFill>
-                  <a:latin typeface="luciole"/>
-                  <a:cs typeface="luciole"/>
+                  <a:latin typeface="Luciole"/>
+                  <a:cs typeface="Luciole"/>
                 </a:rPr>
                 <a:t>(n = 50)</a:t>
               </a:r>
@@ -4189,27 +4017,27 @@
         </p:sp>
         <p:sp>
           <p:nvSpPr>
-            <p:cNvPr id="32" name="pl32"/>
+            <p:cNvPr id="28" name="pl28"/>
             <p:cNvSpPr/>
             <p:nvPr/>
           </p:nvSpPr>
           <p:spPr>
             <a:xfrm>
-              <a:off x="3800475" y="1256861"/>
-              <a:ext cx="1450105" cy="286188"/>
+              <a:off x="3657600" y="1455644"/>
+              <a:ext cx="976149" cy="319484"/>
             </a:xfrm>
             <a:custGeom>
               <a:avLst/>
               <a:pathLst>
-                <a:path w="1450105" h="286188">
+                <a:path w="976149" h="319484">
                   <a:moveTo>
                     <a:pt x="0" y="0"/>
                   </a:moveTo>
                   <a:lnTo>
-                    <a:pt x="0" y="286188"/>
-                  </a:lnTo>
-                  <a:lnTo>
-                    <a:pt x="1450105" y="286188"/>
+                    <a:pt x="0" y="319484"/>
+                  </a:lnTo>
+                  <a:lnTo>
+                    <a:pt x="976149" y="319484"/>
                   </a:lnTo>
                 </a:path>
               </a:pathLst>
@@ -4232,13 +4060,13 @@
         </p:sp>
         <p:sp>
           <p:nvSpPr>
-            <p:cNvPr id="33" name="pl33"/>
+            <p:cNvPr id="29" name="pl29"/>
             <p:cNvSpPr/>
             <p:nvPr/>
           </p:nvSpPr>
           <p:spPr>
             <a:xfrm>
-              <a:off x="5250580" y="1543049"/>
+              <a:off x="4633749" y="1775128"/>
               <a:ext cx="0" cy="0"/>
             </a:xfrm>
             <a:custGeom>
@@ -4275,24 +4103,24 @@
         </p:sp>
         <p:sp>
           <p:nvSpPr>
-            <p:cNvPr id="34" name="pl34"/>
+            <p:cNvPr id="30" name="pl30"/>
             <p:cNvSpPr/>
             <p:nvPr/>
           </p:nvSpPr>
           <p:spPr>
             <a:xfrm>
-              <a:off x="3800475" y="1256861"/>
-              <a:ext cx="0" cy="814692"/>
+              <a:off x="3657600" y="1455644"/>
+              <a:ext cx="0" cy="665606"/>
             </a:xfrm>
             <a:custGeom>
               <a:avLst/>
               <a:pathLst>
-                <a:path w="0" h="814692">
+                <a:path w="0" h="665606">
                   <a:moveTo>
                     <a:pt x="0" y="0"/>
                   </a:moveTo>
                   <a:lnTo>
-                    <a:pt x="0" y="814692"/>
+                    <a:pt x="0" y="665606"/>
                   </a:lnTo>
                 </a:path>
               </a:pathLst>
@@ -4315,13 +4143,13 @@
         </p:sp>
         <p:sp>
           <p:nvSpPr>
-            <p:cNvPr id="35" name="pl35"/>
+            <p:cNvPr id="31" name="pl31"/>
             <p:cNvSpPr/>
             <p:nvPr/>
           </p:nvSpPr>
           <p:spPr>
             <a:xfrm>
-              <a:off x="3800475" y="2071554"/>
+              <a:off x="3657600" y="2121250"/>
               <a:ext cx="0" cy="0"/>
             </a:xfrm>
             <a:custGeom>
@@ -4358,30 +4186,30 @@
         </p:sp>
         <p:sp>
           <p:nvSpPr>
-            <p:cNvPr id="36" name="pl36"/>
+            <p:cNvPr id="32" name="pl32"/>
             <p:cNvSpPr/>
             <p:nvPr/>
           </p:nvSpPr>
           <p:spPr>
             <a:xfrm>
-              <a:off x="2450306" y="3414845"/>
-              <a:ext cx="1350168" cy="672960"/>
+              <a:off x="2286000" y="3464541"/>
+              <a:ext cx="1371600" cy="548721"/>
             </a:xfrm>
             <a:custGeom>
               <a:avLst/>
               <a:pathLst>
-                <a:path w="1350168" h="672960">
+                <a:path w="1371600" h="548721">
                   <a:moveTo>
-                    <a:pt x="1350168" y="0"/>
+                    <a:pt x="1371600" y="0"/>
                   </a:moveTo>
                   <a:lnTo>
-                    <a:pt x="1350168" y="243740"/>
-                  </a:lnTo>
-                  <a:lnTo>
-                    <a:pt x="0" y="243740"/>
-                  </a:lnTo>
-                  <a:lnTo>
-                    <a:pt x="0" y="672960"/>
+                    <a:pt x="1371600" y="393630"/>
+                  </a:lnTo>
+                  <a:lnTo>
+                    <a:pt x="0" y="393630"/>
+                  </a:lnTo>
+                  <a:lnTo>
+                    <a:pt x="0" y="548721"/>
                   </a:lnTo>
                 </a:path>
               </a:pathLst>
@@ -4404,13 +4232,13 @@
         </p:sp>
         <p:sp>
           <p:nvSpPr>
-            <p:cNvPr id="37" name="pl37"/>
+            <p:cNvPr id="33" name="pl33"/>
             <p:cNvSpPr/>
             <p:nvPr/>
           </p:nvSpPr>
           <p:spPr>
             <a:xfrm>
-              <a:off x="2450306" y="4087806"/>
+              <a:off x="2286000" y="4013263"/>
               <a:ext cx="0" cy="0"/>
             </a:xfrm>
             <a:custGeom>
@@ -4447,30 +4275,30 @@
         </p:sp>
         <p:sp>
           <p:nvSpPr>
-            <p:cNvPr id="38" name="pl38"/>
+            <p:cNvPr id="34" name="pl34"/>
             <p:cNvSpPr/>
             <p:nvPr/>
           </p:nvSpPr>
           <p:spPr>
             <a:xfrm>
-              <a:off x="3800475" y="3414845"/>
-              <a:ext cx="1350168" cy="672960"/>
+              <a:off x="3657600" y="3464541"/>
+              <a:ext cx="1371600" cy="548721"/>
             </a:xfrm>
             <a:custGeom>
               <a:avLst/>
               <a:pathLst>
-                <a:path w="1350168" h="672960">
+                <a:path w="1371600" h="548721">
                   <a:moveTo>
                     <a:pt x="0" y="0"/>
                   </a:moveTo>
                   <a:lnTo>
-                    <a:pt x="0" y="243740"/>
-                  </a:lnTo>
-                  <a:lnTo>
-                    <a:pt x="1350168" y="243740"/>
-                  </a:lnTo>
-                  <a:lnTo>
-                    <a:pt x="1350168" y="672960"/>
+                    <a:pt x="0" y="393630"/>
+                  </a:lnTo>
+                  <a:lnTo>
+                    <a:pt x="1371600" y="393630"/>
+                  </a:lnTo>
+                  <a:lnTo>
+                    <a:pt x="1371600" y="548721"/>
                   </a:lnTo>
                 </a:path>
               </a:pathLst>
@@ -4493,13 +4321,13 @@
         </p:sp>
         <p:sp>
           <p:nvSpPr>
-            <p:cNvPr id="39" name="pl39"/>
+            <p:cNvPr id="35" name="pl35"/>
             <p:cNvSpPr/>
             <p:nvPr/>
           </p:nvSpPr>
           <p:spPr>
             <a:xfrm>
-              <a:off x="5150643" y="4087806"/>
+              <a:off x="5029200" y="4013263"/>
               <a:ext cx="0" cy="0"/>
             </a:xfrm>
             <a:custGeom>

--- a/output/fig_flowchart.pptx
+++ b/output/fig_flowchart.pptx
@@ -2271,84 +2271,84 @@
           </p:nvSpPr>
           <p:spPr>
             <a:xfrm>
-              <a:off x="2294439" y="313521"/>
-              <a:ext cx="2726321" cy="1142123"/>
+              <a:off x="1926850" y="340157"/>
+              <a:ext cx="3461498" cy="1343291"/>
             </a:xfrm>
             <a:custGeom>
               <a:avLst/>
               <a:pathLst>
-                <a:path w="2726321" h="1142123">
+                <a:path w="3461498" h="1343291">
                   <a:moveTo>
-                    <a:pt x="63262" y="1142123"/>
+                    <a:pt x="63262" y="1343291"/>
                   </a:moveTo>
                   <a:lnTo>
-                    <a:pt x="2663058" y="1142123"/>
-                  </a:lnTo>
-                  <a:lnTo>
-                    <a:pt x="2660510" y="1142071"/>
-                  </a:lnTo>
-                  <a:lnTo>
-                    <a:pt x="2670683" y="1141661"/>
-                  </a:lnTo>
-                  <a:lnTo>
-                    <a:pt x="2680659" y="1139625"/>
-                  </a:lnTo>
-                  <a:lnTo>
-                    <a:pt x="2690178" y="1136015"/>
-                  </a:lnTo>
-                  <a:lnTo>
-                    <a:pt x="2698995" y="1130924"/>
-                  </a:lnTo>
-                  <a:lnTo>
-                    <a:pt x="2706881" y="1124485"/>
-                  </a:lnTo>
-                  <a:lnTo>
-                    <a:pt x="2713633" y="1116864"/>
-                  </a:lnTo>
-                  <a:lnTo>
-                    <a:pt x="2719074" y="1108259"/>
-                  </a:lnTo>
-                  <a:lnTo>
-                    <a:pt x="2723065" y="1098893"/>
-                  </a:lnTo>
-                  <a:lnTo>
-                    <a:pt x="2725501" y="1089008"/>
-                  </a:lnTo>
-                  <a:lnTo>
-                    <a:pt x="2726321" y="1078860"/>
-                  </a:lnTo>
-                  <a:lnTo>
-                    <a:pt x="2726321" y="63262"/>
-                  </a:lnTo>
-                  <a:lnTo>
-                    <a:pt x="2725501" y="53114"/>
-                  </a:lnTo>
-                  <a:lnTo>
-                    <a:pt x="2723065" y="43229"/>
-                  </a:lnTo>
-                  <a:lnTo>
-                    <a:pt x="2719074" y="33863"/>
-                  </a:lnTo>
-                  <a:lnTo>
-                    <a:pt x="2713633" y="25258"/>
-                  </a:lnTo>
-                  <a:lnTo>
-                    <a:pt x="2706881" y="17637"/>
-                  </a:lnTo>
-                  <a:lnTo>
-                    <a:pt x="2698995" y="11198"/>
-                  </a:lnTo>
-                  <a:lnTo>
-                    <a:pt x="2690178" y="6107"/>
-                  </a:lnTo>
-                  <a:lnTo>
-                    <a:pt x="2680659" y="2497"/>
-                  </a:lnTo>
-                  <a:lnTo>
-                    <a:pt x="2670683" y="461"/>
-                  </a:lnTo>
-                  <a:lnTo>
-                    <a:pt x="2663058" y="0"/>
+                    <a:pt x="3398235" y="1343291"/>
+                  </a:lnTo>
+                  <a:lnTo>
+                    <a:pt x="3395688" y="1343239"/>
+                  </a:lnTo>
+                  <a:lnTo>
+                    <a:pt x="3405861" y="1342829"/>
+                  </a:lnTo>
+                  <a:lnTo>
+                    <a:pt x="3415836" y="1340793"/>
+                  </a:lnTo>
+                  <a:lnTo>
+                    <a:pt x="3425356" y="1337183"/>
+                  </a:lnTo>
+                  <a:lnTo>
+                    <a:pt x="3434173" y="1332092"/>
+                  </a:lnTo>
+                  <a:lnTo>
+                    <a:pt x="3442059" y="1325653"/>
+                  </a:lnTo>
+                  <a:lnTo>
+                    <a:pt x="3448810" y="1318032"/>
+                  </a:lnTo>
+                  <a:lnTo>
+                    <a:pt x="3454252" y="1309427"/>
+                  </a:lnTo>
+                  <a:lnTo>
+                    <a:pt x="3458242" y="1300061"/>
+                  </a:lnTo>
+                  <a:lnTo>
+                    <a:pt x="3460679" y="1290176"/>
+                  </a:lnTo>
+                  <a:lnTo>
+                    <a:pt x="3461498" y="1280028"/>
+                  </a:lnTo>
+                  <a:lnTo>
+                    <a:pt x="3461498" y="63262"/>
+                  </a:lnTo>
+                  <a:lnTo>
+                    <a:pt x="3460679" y="53114"/>
+                  </a:lnTo>
+                  <a:lnTo>
+                    <a:pt x="3458242" y="43229"/>
+                  </a:lnTo>
+                  <a:lnTo>
+                    <a:pt x="3454252" y="33863"/>
+                  </a:lnTo>
+                  <a:lnTo>
+                    <a:pt x="3448810" y="25258"/>
+                  </a:lnTo>
+                  <a:lnTo>
+                    <a:pt x="3442059" y="17637"/>
+                  </a:lnTo>
+                  <a:lnTo>
+                    <a:pt x="3434173" y="11198"/>
+                  </a:lnTo>
+                  <a:lnTo>
+                    <a:pt x="3425356" y="6107"/>
+                  </a:lnTo>
+                  <a:lnTo>
+                    <a:pt x="3415836" y="2497"/>
+                  </a:lnTo>
+                  <a:lnTo>
+                    <a:pt x="3405861" y="461"/>
+                  </a:lnTo>
+                  <a:lnTo>
+                    <a:pt x="3398235" y="0"/>
                   </a:lnTo>
                   <a:lnTo>
                     <a:pt x="63262" y="0"/>
@@ -2390,40 +2390,40 @@
                     <a:pt x="0" y="63262"/>
                   </a:lnTo>
                   <a:lnTo>
-                    <a:pt x="0" y="1078860"/>
-                  </a:lnTo>
-                  <a:lnTo>
-                    <a:pt x="205" y="1073769"/>
-                  </a:lnTo>
-                  <a:lnTo>
-                    <a:pt x="205" y="1083950"/>
-                  </a:lnTo>
-                  <a:lnTo>
-                    <a:pt x="1838" y="1094000"/>
-                  </a:lnTo>
-                  <a:lnTo>
-                    <a:pt x="5062" y="1103657"/>
-                  </a:lnTo>
-                  <a:lnTo>
-                    <a:pt x="9793" y="1112672"/>
-                  </a:lnTo>
-                  <a:lnTo>
-                    <a:pt x="15909" y="1120811"/>
-                  </a:lnTo>
-                  <a:lnTo>
-                    <a:pt x="23252" y="1127863"/>
-                  </a:lnTo>
-                  <a:lnTo>
-                    <a:pt x="31631" y="1133647"/>
-                  </a:lnTo>
-                  <a:lnTo>
-                    <a:pt x="40829" y="1138011"/>
-                  </a:lnTo>
-                  <a:lnTo>
-                    <a:pt x="50608" y="1140844"/>
-                  </a:lnTo>
-                  <a:lnTo>
-                    <a:pt x="60715" y="1142071"/>
+                    <a:pt x="0" y="1280028"/>
+                  </a:lnTo>
+                  <a:lnTo>
+                    <a:pt x="205" y="1274937"/>
+                  </a:lnTo>
+                  <a:lnTo>
+                    <a:pt x="205" y="1285118"/>
+                  </a:lnTo>
+                  <a:lnTo>
+                    <a:pt x="1838" y="1295168"/>
+                  </a:lnTo>
+                  <a:lnTo>
+                    <a:pt x="5062" y="1304825"/>
+                  </a:lnTo>
+                  <a:lnTo>
+                    <a:pt x="9793" y="1313840"/>
+                  </a:lnTo>
+                  <a:lnTo>
+                    <a:pt x="15909" y="1321979"/>
+                  </a:lnTo>
+                  <a:lnTo>
+                    <a:pt x="23252" y="1329031"/>
+                  </a:lnTo>
+                  <a:lnTo>
+                    <a:pt x="31631" y="1334815"/>
+                  </a:lnTo>
+                  <a:lnTo>
+                    <a:pt x="40829" y="1339179"/>
+                  </a:lnTo>
+                  <a:lnTo>
+                    <a:pt x="50608" y="1342012"/>
+                  </a:lnTo>
+                  <a:lnTo>
+                    <a:pt x="60715" y="1343239"/>
                   </a:lnTo>
                   <a:close/>
                 </a:path>
@@ -2458,8 +2458,8 @@
           </p:nvSpPr>
           <p:spPr>
             <a:xfrm>
-              <a:off x="2510439" y="529521"/>
-              <a:ext cx="1856780" cy="106619"/>
+              <a:off x="2142850" y="556157"/>
+              <a:ext cx="1321399" cy="106619"/>
             </a:xfrm>
             <a:prstGeom prst="rect">
               <a:avLst/>
@@ -2488,7 +2488,7 @@
                   <a:latin typeface="Luciole"/>
                   <a:cs typeface="Luciole"/>
                 </a:rPr>
-                <a:t>Patients éligibles (N = 333)</a:t>
+                <a:t>Éligibilité (N = 333)</a:t>
               </a:r>
             </a:p>
           </p:txBody>
@@ -2501,8 +2501,8 @@
           </p:nvSpPr>
           <p:spPr>
             <a:xfrm>
-              <a:off x="2510439" y="730689"/>
-              <a:ext cx="2244211" cy="106619"/>
+              <a:off x="2142850" y="757325"/>
+              <a:ext cx="1426464" cy="106619"/>
             </a:xfrm>
             <a:prstGeom prst="rect">
               <a:avLst/>
@@ -2531,7 +2531,7 @@
                   <a:latin typeface="Luciole"/>
                   <a:cs typeface="Luciole"/>
                 </a:rPr>
-                <a:t>- Hommes et femmes &gt;= 18 ans</a:t>
+                <a:t>- Patients &gt;= 18 ans</a:t>
               </a:r>
             </a:p>
           </p:txBody>
@@ -2544,8 +2544,8 @@
           </p:nvSpPr>
           <p:spPr>
             <a:xfrm>
-              <a:off x="2510439" y="931857"/>
-              <a:ext cx="2294321" cy="106619"/>
+              <a:off x="2142850" y="958493"/>
+              <a:ext cx="3029498" cy="106619"/>
             </a:xfrm>
             <a:prstGeom prst="rect">
               <a:avLst/>
@@ -2574,7 +2574,7 @@
                   <a:latin typeface="Luciole"/>
                   <a:cs typeface="Luciole"/>
                 </a:rPr>
-                <a:t>- Opérés d'un cancer du pancréas</a:t>
+                <a:t>- Diagnostic d’adénocarcinome pancréatique</a:t>
               </a:r>
             </a:p>
           </p:txBody>
@@ -2587,8 +2587,8 @@
           </p:nvSpPr>
           <p:spPr>
             <a:xfrm>
-              <a:off x="2510439" y="1133025"/>
-              <a:ext cx="1903140" cy="106619"/>
+              <a:off x="2142850" y="1159661"/>
+              <a:ext cx="2757738" cy="106619"/>
             </a:xfrm>
             <a:prstGeom prst="rect">
               <a:avLst/>
@@ -2617,97 +2617,140 @@
                   <a:latin typeface="Luciole"/>
                   <a:cs typeface="Luciole"/>
                 </a:rPr>
-                <a:t>- Entre 01/2022 et 12/2025</a:t>
+                <a:t>- Indication chirurgicale retenue en RCP</a:t>
               </a:r>
             </a:p>
           </p:txBody>
         </p:sp>
         <p:sp>
           <p:nvSpPr>
-            <p:cNvPr id="9" name="pg9"/>
+            <p:cNvPr id="9" name="tx9"/>
             <p:cNvSpPr/>
             <p:nvPr/>
           </p:nvSpPr>
           <p:spPr>
             <a:xfrm>
-              <a:off x="4633749" y="1078748"/>
-              <a:ext cx="4448502" cy="1392760"/>
+              <a:off x="2142850" y="1360829"/>
+              <a:ext cx="3025018" cy="106619"/>
+            </a:xfrm>
+            <a:prstGeom prst="rect">
+              <a:avLst/>
+            </a:prstGeom>
+            <a:noFill/>
+          </p:spPr>
+          <p:txBody>
+            <a:bodyPr lIns="0" rIns="0" tIns="0" bIns="0" anchorCtr="1" anchor="ctr" wrap="none"/>
+            <a:lstStyle/>
+            <a:p>
+              <a:pPr algn="l" marL="0" marR="0" indent="0">
+                <a:spcBef>
+                  <a:spcPts val="0"/>
+                </a:spcBef>
+                <a:spcAft>
+                  <a:spcPts val="0"/>
+                </a:spcAft>
+              </a:pPr>
+              <a:r>
+                <a:rPr sz="1100" i="0" b="0">
+                  <a:solidFill>
+                    <a:srgbClr val="333333">
+                      <a:alpha val="100000"/>
+                    </a:srgbClr>
+                  </a:solidFill>
+                  <a:latin typeface="Luciole"/>
+                  <a:cs typeface="Luciole"/>
+                </a:rPr>
+                <a:t>- Date opératoire entre 01/2022 et 12/2025</a:t>
+              </a:r>
+            </a:p>
+          </p:txBody>
+        </p:sp>
+        <p:sp>
+          <p:nvSpPr>
+            <p:cNvPr id="10" name="pg10"/>
+            <p:cNvSpPr/>
+            <p:nvPr/>
+          </p:nvSpPr>
+          <p:spPr>
+            <a:xfrm>
+              <a:off x="5056064" y="1205969"/>
+              <a:ext cx="3969630" cy="1392760"/>
             </a:xfrm>
             <a:custGeom>
               <a:avLst/>
               <a:pathLst>
-                <a:path w="4448502" h="1392760">
+                <a:path w="3969630" h="1392760">
                   <a:moveTo>
                     <a:pt x="63262" y="1392760"/>
                   </a:moveTo>
                   <a:lnTo>
-                    <a:pt x="4385239" y="1392760"/>
-                  </a:lnTo>
-                  <a:lnTo>
-                    <a:pt x="4382691" y="1392708"/>
-                  </a:lnTo>
-                  <a:lnTo>
-                    <a:pt x="4392864" y="1392298"/>
-                  </a:lnTo>
-                  <a:lnTo>
-                    <a:pt x="4402840" y="1390262"/>
-                  </a:lnTo>
-                  <a:lnTo>
-                    <a:pt x="4412359" y="1386652"/>
-                  </a:lnTo>
-                  <a:lnTo>
-                    <a:pt x="4421176" y="1381561"/>
-                  </a:lnTo>
-                  <a:lnTo>
-                    <a:pt x="4429062" y="1375122"/>
-                  </a:lnTo>
-                  <a:lnTo>
-                    <a:pt x="4435814" y="1367501"/>
-                  </a:lnTo>
-                  <a:lnTo>
-                    <a:pt x="4441255" y="1358896"/>
-                  </a:lnTo>
-                  <a:lnTo>
-                    <a:pt x="4445246" y="1349530"/>
-                  </a:lnTo>
-                  <a:lnTo>
-                    <a:pt x="4447682" y="1339645"/>
-                  </a:lnTo>
-                  <a:lnTo>
-                    <a:pt x="4448502" y="1329497"/>
-                  </a:lnTo>
-                  <a:lnTo>
-                    <a:pt x="4448502" y="63262"/>
-                  </a:lnTo>
-                  <a:lnTo>
-                    <a:pt x="4447682" y="53114"/>
-                  </a:lnTo>
-                  <a:lnTo>
-                    <a:pt x="4445246" y="43229"/>
-                  </a:lnTo>
-                  <a:lnTo>
-                    <a:pt x="4441255" y="33863"/>
-                  </a:lnTo>
-                  <a:lnTo>
-                    <a:pt x="4435814" y="25258"/>
-                  </a:lnTo>
-                  <a:lnTo>
-                    <a:pt x="4429062" y="17637"/>
-                  </a:lnTo>
-                  <a:lnTo>
-                    <a:pt x="4421176" y="11198"/>
-                  </a:lnTo>
-                  <a:lnTo>
-                    <a:pt x="4412359" y="6107"/>
-                  </a:lnTo>
-                  <a:lnTo>
-                    <a:pt x="4402840" y="2497"/>
-                  </a:lnTo>
-                  <a:lnTo>
-                    <a:pt x="4392864" y="461"/>
-                  </a:lnTo>
-                  <a:lnTo>
-                    <a:pt x="4385239" y="0"/>
+                    <a:pt x="3906367" y="1392760"/>
+                  </a:lnTo>
+                  <a:lnTo>
+                    <a:pt x="3903820" y="1392708"/>
+                  </a:lnTo>
+                  <a:lnTo>
+                    <a:pt x="3913993" y="1392298"/>
+                  </a:lnTo>
+                  <a:lnTo>
+                    <a:pt x="3923968" y="1390262"/>
+                  </a:lnTo>
+                  <a:lnTo>
+                    <a:pt x="3933488" y="1386652"/>
+                  </a:lnTo>
+                  <a:lnTo>
+                    <a:pt x="3942305" y="1381561"/>
+                  </a:lnTo>
+                  <a:lnTo>
+                    <a:pt x="3950191" y="1375122"/>
+                  </a:lnTo>
+                  <a:lnTo>
+                    <a:pt x="3956942" y="1367501"/>
+                  </a:lnTo>
+                  <a:lnTo>
+                    <a:pt x="3962384" y="1358896"/>
+                  </a:lnTo>
+                  <a:lnTo>
+                    <a:pt x="3966374" y="1349530"/>
+                  </a:lnTo>
+                  <a:lnTo>
+                    <a:pt x="3968811" y="1339645"/>
+                  </a:lnTo>
+                  <a:lnTo>
+                    <a:pt x="3969630" y="1329497"/>
+                  </a:lnTo>
+                  <a:lnTo>
+                    <a:pt x="3969630" y="63262"/>
+                  </a:lnTo>
+                  <a:lnTo>
+                    <a:pt x="3968811" y="53114"/>
+                  </a:lnTo>
+                  <a:lnTo>
+                    <a:pt x="3966374" y="43229"/>
+                  </a:lnTo>
+                  <a:lnTo>
+                    <a:pt x="3962384" y="33863"/>
+                  </a:lnTo>
+                  <a:lnTo>
+                    <a:pt x="3956942" y="25258"/>
+                  </a:lnTo>
+                  <a:lnTo>
+                    <a:pt x="3950191" y="17637"/>
+                  </a:lnTo>
+                  <a:lnTo>
+                    <a:pt x="3942305" y="11198"/>
+                  </a:lnTo>
+                  <a:lnTo>
+                    <a:pt x="3933488" y="6107"/>
+                  </a:lnTo>
+                  <a:lnTo>
+                    <a:pt x="3923968" y="2497"/>
+                  </a:lnTo>
+                  <a:lnTo>
+                    <a:pt x="3913993" y="461"/>
+                  </a:lnTo>
+                  <a:lnTo>
+                    <a:pt x="3906367" y="0"/>
                   </a:lnTo>
                   <a:lnTo>
                     <a:pt x="63262" y="0"/>
@@ -2811,14 +2854,14 @@
         </p:sp>
         <p:sp>
           <p:nvSpPr>
-            <p:cNvPr id="10" name="tx10"/>
+            <p:cNvPr id="11" name="tx11"/>
             <p:cNvSpPr/>
             <p:nvPr/>
           </p:nvSpPr>
           <p:spPr>
             <a:xfrm>
-              <a:off x="4849748" y="1294748"/>
-              <a:ext cx="958931" cy="92080"/>
+              <a:off x="5272064" y="1421969"/>
+              <a:ext cx="1140439" cy="92080"/>
             </a:xfrm>
             <a:prstGeom prst="rect">
               <a:avLst/>
@@ -2847,21 +2890,21 @@
                   <a:latin typeface="Luciole"/>
                   <a:cs typeface="Luciole"/>
                 </a:rPr>
-                <a:t>Exclus (n = 230)</a:t>
+                <a:t>Exclusion (n = 230)</a:t>
               </a:r>
             </a:p>
           </p:txBody>
         </p:sp>
         <p:sp>
           <p:nvSpPr>
-            <p:cNvPr id="11" name="tx11"/>
+            <p:cNvPr id="12" name="tx12"/>
             <p:cNvSpPr/>
             <p:nvPr/>
           </p:nvSpPr>
           <p:spPr>
             <a:xfrm>
-              <a:off x="4849748" y="1468484"/>
-              <a:ext cx="2911175" cy="92080"/>
+              <a:off x="5272064" y="1595705"/>
+              <a:ext cx="2925531" cy="92080"/>
             </a:xfrm>
             <a:prstGeom prst="rect">
               <a:avLst/>
@@ -2890,21 +2933,21 @@
                   <a:latin typeface="Luciole"/>
                   <a:cs typeface="Luciole"/>
                 </a:rPr>
-                <a:t>- autre diagnostic anatomopathologique (n = 85)</a:t>
+                <a:t>- Autre diagnostic anatomopathologique (n = 85)</a:t>
               </a:r>
             </a:p>
           </p:txBody>
         </p:sp>
         <p:sp>
           <p:nvSpPr>
-            <p:cNvPr id="12" name="tx12"/>
+            <p:cNvPr id="13" name="tx13"/>
             <p:cNvSpPr/>
             <p:nvPr/>
           </p:nvSpPr>
           <p:spPr>
             <a:xfrm>
-              <a:off x="4849748" y="1642220"/>
-              <a:ext cx="3338382" cy="92080"/>
+              <a:off x="5272064" y="1769441"/>
+              <a:ext cx="3368649" cy="92080"/>
             </a:xfrm>
             <a:prstGeom prst="rect">
               <a:avLst/>
@@ -2933,21 +2976,21 @@
                   <a:latin typeface="Luciole"/>
                   <a:cs typeface="Luciole"/>
                 </a:rPr>
-                <a:t>- lésion non opérable ou d'emblée métastatique (n = 77)</a:t>
+                <a:t>- Lésion non opérable ou d'emblée métastatique (n = 77)</a:t>
               </a:r>
             </a:p>
           </p:txBody>
         </p:sp>
         <p:sp>
           <p:nvSpPr>
-            <p:cNvPr id="13" name="tx13"/>
+            <p:cNvPr id="14" name="tx14"/>
             <p:cNvSpPr/>
             <p:nvPr/>
           </p:nvSpPr>
           <p:spPr>
             <a:xfrm>
-              <a:off x="4849748" y="1815956"/>
-              <a:ext cx="1870953" cy="92080"/>
+              <a:off x="5272064" y="1943177"/>
+              <a:ext cx="1885675" cy="92080"/>
             </a:xfrm>
             <a:prstGeom prst="rect">
               <a:avLst/>
@@ -2976,21 +3019,21 @@
                   <a:latin typeface="Luciole"/>
                   <a:cs typeface="Luciole"/>
                 </a:rPr>
-                <a:t>- données manquantes (n = 41)</a:t>
+                <a:t>- Données manquantes (n = 41)</a:t>
               </a:r>
             </a:p>
           </p:txBody>
         </p:sp>
         <p:sp>
           <p:nvSpPr>
-            <p:cNvPr id="14" name="tx14"/>
+            <p:cNvPr id="15" name="tx15"/>
             <p:cNvSpPr/>
             <p:nvPr/>
           </p:nvSpPr>
           <p:spPr>
             <a:xfrm>
-              <a:off x="4849749" y="1989692"/>
-              <a:ext cx="2833817" cy="92080"/>
+              <a:off x="5272064" y="2116913"/>
+              <a:ext cx="2641701" cy="92080"/>
             </a:xfrm>
             <a:prstGeom prst="rect">
               <a:avLst/>
@@ -3019,21 +3062,21 @@
                   <a:latin typeface="Luciole"/>
                   <a:cs typeface="Luciole"/>
                 </a:rPr>
-                <a:t>- protocole différent de chimiothérapie (n = 16)</a:t>
+                <a:t>- Autre protocole de chimiothérapie (n = 16)</a:t>
               </a:r>
             </a:p>
           </p:txBody>
         </p:sp>
         <p:sp>
           <p:nvSpPr>
-            <p:cNvPr id="15" name="tx15"/>
+            <p:cNvPr id="16" name="tx16"/>
             <p:cNvSpPr/>
             <p:nvPr/>
           </p:nvSpPr>
           <p:spPr>
             <a:xfrm>
-              <a:off x="4849749" y="2163428"/>
-              <a:ext cx="4016502" cy="92080"/>
+              <a:off x="5272064" y="2290649"/>
+              <a:ext cx="3537630" cy="92080"/>
             </a:xfrm>
             <a:prstGeom prst="rect">
               <a:avLst/>
@@ -3062,97 +3105,97 @@
                   <a:latin typeface="Luciole"/>
                   <a:cs typeface="Luciole"/>
                 </a:rPr>
-                <a:t>- décès précoce suivant le diagnostic ou en post-opératoire (n = 11)</a:t>
+                <a:t>- Décès précoce post-diagnostic ou post-opératoire (n = 11)</a:t>
               </a:r>
             </a:p>
           </p:txBody>
         </p:sp>
         <p:sp>
           <p:nvSpPr>
-            <p:cNvPr id="16" name="pg16"/>
+            <p:cNvPr id="17" name="pg17"/>
             <p:cNvSpPr/>
             <p:nvPr/>
           </p:nvSpPr>
           <p:spPr>
             <a:xfrm>
-              <a:off x="2663857" y="2121250"/>
-              <a:ext cx="1987485" cy="1343291"/>
+              <a:off x="2310761" y="2121250"/>
+              <a:ext cx="2693676" cy="1343291"/>
             </a:xfrm>
             <a:custGeom>
               <a:avLst/>
               <a:pathLst>
-                <a:path w="1987485" h="1343291">
+                <a:path w="2693676" h="1343291">
                   <a:moveTo>
                     <a:pt x="63262" y="1343291"/>
                   </a:moveTo>
                   <a:lnTo>
-                    <a:pt x="1924223" y="1343291"/>
-                  </a:lnTo>
-                  <a:lnTo>
-                    <a:pt x="1921675" y="1343239"/>
-                  </a:lnTo>
-                  <a:lnTo>
-                    <a:pt x="1931848" y="1342829"/>
-                  </a:lnTo>
-                  <a:lnTo>
-                    <a:pt x="1941823" y="1340793"/>
-                  </a:lnTo>
-                  <a:lnTo>
-                    <a:pt x="1951343" y="1337183"/>
-                  </a:lnTo>
-                  <a:lnTo>
-                    <a:pt x="1960160" y="1332092"/>
-                  </a:lnTo>
-                  <a:lnTo>
-                    <a:pt x="1968046" y="1325653"/>
-                  </a:lnTo>
-                  <a:lnTo>
-                    <a:pt x="1974798" y="1318032"/>
-                  </a:lnTo>
-                  <a:lnTo>
-                    <a:pt x="1980239" y="1309427"/>
-                  </a:lnTo>
-                  <a:lnTo>
-                    <a:pt x="1984230" y="1300061"/>
-                  </a:lnTo>
-                  <a:lnTo>
-                    <a:pt x="1986666" y="1290176"/>
-                  </a:lnTo>
-                  <a:lnTo>
-                    <a:pt x="1987485" y="1280028"/>
-                  </a:lnTo>
-                  <a:lnTo>
-                    <a:pt x="1987485" y="63262"/>
-                  </a:lnTo>
-                  <a:lnTo>
-                    <a:pt x="1986666" y="53114"/>
-                  </a:lnTo>
-                  <a:lnTo>
-                    <a:pt x="1984230" y="43229"/>
-                  </a:lnTo>
-                  <a:lnTo>
-                    <a:pt x="1980239" y="33863"/>
-                  </a:lnTo>
-                  <a:lnTo>
-                    <a:pt x="1974798" y="25258"/>
-                  </a:lnTo>
-                  <a:lnTo>
-                    <a:pt x="1968046" y="17637"/>
-                  </a:lnTo>
-                  <a:lnTo>
-                    <a:pt x="1960160" y="11198"/>
-                  </a:lnTo>
-                  <a:lnTo>
-                    <a:pt x="1951343" y="6107"/>
-                  </a:lnTo>
-                  <a:lnTo>
-                    <a:pt x="1941823" y="2497"/>
-                  </a:lnTo>
-                  <a:lnTo>
-                    <a:pt x="1931848" y="461"/>
-                  </a:lnTo>
-                  <a:lnTo>
-                    <a:pt x="1924223" y="0"/>
+                    <a:pt x="2630414" y="1343291"/>
+                  </a:lnTo>
+                  <a:lnTo>
+                    <a:pt x="2627866" y="1343239"/>
+                  </a:lnTo>
+                  <a:lnTo>
+                    <a:pt x="2638039" y="1342829"/>
+                  </a:lnTo>
+                  <a:lnTo>
+                    <a:pt x="2648015" y="1340793"/>
+                  </a:lnTo>
+                  <a:lnTo>
+                    <a:pt x="2657534" y="1337183"/>
+                  </a:lnTo>
+                  <a:lnTo>
+                    <a:pt x="2666351" y="1332092"/>
+                  </a:lnTo>
+                  <a:lnTo>
+                    <a:pt x="2674237" y="1325653"/>
+                  </a:lnTo>
+                  <a:lnTo>
+                    <a:pt x="2680989" y="1318032"/>
+                  </a:lnTo>
+                  <a:lnTo>
+                    <a:pt x="2686430" y="1309427"/>
+                  </a:lnTo>
+                  <a:lnTo>
+                    <a:pt x="2690421" y="1300061"/>
+                  </a:lnTo>
+                  <a:lnTo>
+                    <a:pt x="2692857" y="1290176"/>
+                  </a:lnTo>
+                  <a:lnTo>
+                    <a:pt x="2693676" y="1280028"/>
+                  </a:lnTo>
+                  <a:lnTo>
+                    <a:pt x="2693676" y="63262"/>
+                  </a:lnTo>
+                  <a:lnTo>
+                    <a:pt x="2692857" y="53114"/>
+                  </a:lnTo>
+                  <a:lnTo>
+                    <a:pt x="2690421" y="43229"/>
+                  </a:lnTo>
+                  <a:lnTo>
+                    <a:pt x="2686430" y="33863"/>
+                  </a:lnTo>
+                  <a:lnTo>
+                    <a:pt x="2680989" y="25258"/>
+                  </a:lnTo>
+                  <a:lnTo>
+                    <a:pt x="2674237" y="17637"/>
+                  </a:lnTo>
+                  <a:lnTo>
+                    <a:pt x="2666351" y="11198"/>
+                  </a:lnTo>
+                  <a:lnTo>
+                    <a:pt x="2657534" y="6107"/>
+                  </a:lnTo>
+                  <a:lnTo>
+                    <a:pt x="2648015" y="2497"/>
+                  </a:lnTo>
+                  <a:lnTo>
+                    <a:pt x="2638039" y="461"/>
+                  </a:lnTo>
+                  <a:lnTo>
+                    <a:pt x="2630414" y="0"/>
                   </a:lnTo>
                   <a:lnTo>
                     <a:pt x="63262" y="0"/>
@@ -3256,14 +3299,14 @@
         </p:sp>
         <p:sp>
           <p:nvSpPr>
-            <p:cNvPr id="17" name="tx17"/>
+            <p:cNvPr id="18" name="tx18"/>
             <p:cNvSpPr/>
             <p:nvPr/>
           </p:nvSpPr>
           <p:spPr>
             <a:xfrm>
-              <a:off x="2879857" y="2337250"/>
-              <a:ext cx="1106058" cy="106619"/>
+              <a:off x="2526761" y="2337250"/>
+              <a:ext cx="1316278" cy="106619"/>
             </a:xfrm>
             <a:prstGeom prst="rect">
               <a:avLst/>
@@ -3292,20 +3335,20 @@
                   <a:latin typeface="Luciole"/>
                   <a:cs typeface="Luciole"/>
                 </a:rPr>
-                <a:t>Inclus (n = 103)</a:t>
+                <a:t>Inclusion (n = 103)</a:t>
               </a:r>
             </a:p>
           </p:txBody>
         </p:sp>
         <p:sp>
           <p:nvSpPr>
-            <p:cNvPr id="18" name="tx18"/>
+            <p:cNvPr id="19" name="tx19"/>
             <p:cNvSpPr/>
             <p:nvPr/>
           </p:nvSpPr>
           <p:spPr>
             <a:xfrm>
-              <a:off x="2879857" y="2538418"/>
+              <a:off x="2526761" y="2538418"/>
               <a:ext cx="1535369" cy="106619"/>
             </a:xfrm>
             <a:prstGeom prst="rect">
@@ -3342,13 +3385,13 @@
         </p:sp>
         <p:sp>
           <p:nvSpPr>
-            <p:cNvPr id="19" name="tx19"/>
+            <p:cNvPr id="20" name="tx20"/>
             <p:cNvSpPr/>
             <p:nvPr/>
           </p:nvSpPr>
           <p:spPr>
             <a:xfrm>
-              <a:off x="2879857" y="2739586"/>
+              <a:off x="2526761" y="2739586"/>
               <a:ext cx="1540306" cy="106619"/>
             </a:xfrm>
             <a:prstGeom prst="rect">
@@ -3385,14 +3428,14 @@
         </p:sp>
         <p:sp>
           <p:nvSpPr>
-            <p:cNvPr id="20" name="tx20"/>
+            <p:cNvPr id="21" name="tx21"/>
             <p:cNvSpPr/>
             <p:nvPr/>
           </p:nvSpPr>
           <p:spPr>
             <a:xfrm>
-              <a:off x="2879857" y="2940754"/>
-              <a:ext cx="1555485" cy="106619"/>
+              <a:off x="2526761" y="2940754"/>
+              <a:ext cx="2261676" cy="106619"/>
             </a:xfrm>
             <a:prstGeom prst="rect">
               <a:avLst/>
@@ -3421,20 +3464,20 @@
                   <a:latin typeface="Luciole"/>
                   <a:cs typeface="Luciole"/>
                 </a:rPr>
-                <a:t>- CHD Vendée (n = 25)</a:t>
+                <a:t>- CHD La Roche-sur-Yon (n = 25)</a:t>
               </a:r>
             </a:p>
           </p:txBody>
         </p:sp>
         <p:sp>
           <p:nvSpPr>
-            <p:cNvPr id="21" name="tx21"/>
+            <p:cNvPr id="22" name="tx22"/>
             <p:cNvSpPr/>
             <p:nvPr/>
           </p:nvSpPr>
           <p:spPr>
             <a:xfrm>
-              <a:off x="2879857" y="3141922"/>
+              <a:off x="2526761" y="3141922"/>
               <a:ext cx="1362821" cy="106619"/>
             </a:xfrm>
             <a:prstGeom prst="rect">
@@ -3471,7 +3514,7 @@
         </p:sp>
         <p:sp>
           <p:nvSpPr>
-            <p:cNvPr id="22" name="pg22"/>
+            <p:cNvPr id="23" name="pg23"/>
             <p:cNvSpPr/>
             <p:nvPr/>
           </p:nvSpPr>
@@ -3658,7 +3701,7 @@
         </p:sp>
         <p:sp>
           <p:nvSpPr>
-            <p:cNvPr id="23" name="tx23"/>
+            <p:cNvPr id="24" name="tx24"/>
             <p:cNvSpPr/>
             <p:nvPr/>
           </p:nvSpPr>
@@ -3701,7 +3744,7 @@
         </p:sp>
         <p:sp>
           <p:nvSpPr>
-            <p:cNvPr id="24" name="tx24"/>
+            <p:cNvPr id="25" name="tx25"/>
             <p:cNvSpPr/>
             <p:nvPr/>
           </p:nvSpPr>
@@ -3744,7 +3787,7 @@
         </p:sp>
         <p:sp>
           <p:nvSpPr>
-            <p:cNvPr id="25" name="pg25"/>
+            <p:cNvPr id="26" name="pg26"/>
             <p:cNvSpPr/>
             <p:nvPr/>
           </p:nvSpPr>
@@ -3931,7 +3974,7 @@
         </p:sp>
         <p:sp>
           <p:nvSpPr>
-            <p:cNvPr id="26" name="tx26"/>
+            <p:cNvPr id="27" name="tx27"/>
             <p:cNvSpPr/>
             <p:nvPr/>
           </p:nvSpPr>
@@ -3974,7 +4017,7 @@
         </p:sp>
         <p:sp>
           <p:nvSpPr>
-            <p:cNvPr id="27" name="tx27"/>
+            <p:cNvPr id="28" name="tx28"/>
             <p:cNvSpPr/>
             <p:nvPr/>
           </p:nvSpPr>
@@ -4017,70 +4060,27 @@
         </p:sp>
         <p:sp>
           <p:nvSpPr>
-            <p:cNvPr id="28" name="pl28"/>
-            <p:cNvSpPr/>
-            <p:nvPr/>
-          </p:nvSpPr>
-          <p:spPr>
-            <a:xfrm>
-              <a:off x="3657600" y="1455644"/>
-              <a:ext cx="976149" cy="319484"/>
-            </a:xfrm>
-            <a:custGeom>
-              <a:avLst/>
-              <a:pathLst>
-                <a:path w="976149" h="319484">
-                  <a:moveTo>
-                    <a:pt x="0" y="0"/>
-                  </a:moveTo>
-                  <a:lnTo>
-                    <a:pt x="0" y="319484"/>
-                  </a:lnTo>
-                  <a:lnTo>
-                    <a:pt x="976149" y="319484"/>
-                  </a:lnTo>
-                </a:path>
-              </a:pathLst>
-            </a:custGeom>
-            <a:ln w="23812" cap="rnd">
-              <a:solidFill>
-                <a:srgbClr val="E5E5E5">
-                  <a:alpha val="100000"/>
-                </a:srgbClr>
-              </a:solidFill>
-              <a:prstDash val="solid"/>
-              <a:round/>
-            </a:ln>
-          </p:spPr>
-          <p:txBody>
-            <a:bodyPr/>
-            <a:lstStyle/>
-            <a:p/>
-          </p:txBody>
-        </p:sp>
-        <p:sp>
-          <p:nvSpPr>
             <p:cNvPr id="29" name="pl29"/>
             <p:cNvSpPr/>
             <p:nvPr/>
           </p:nvSpPr>
           <p:spPr>
             <a:xfrm>
-              <a:off x="4633749" y="1775128"/>
-              <a:ext cx="0" cy="0"/>
+              <a:off x="3657600" y="1683448"/>
+              <a:ext cx="1398464" cy="218900"/>
             </a:xfrm>
             <a:custGeom>
               <a:avLst/>
               <a:pathLst>
-                <a:path w="0" h="0">
+                <a:path w="1398464" h="218900">
                   <a:moveTo>
                     <a:pt x="0" y="0"/>
                   </a:moveTo>
                   <a:lnTo>
-                    <a:pt x="0" y="0"/>
-                  </a:lnTo>
-                  <a:lnTo>
-                    <a:pt x="0" y="0"/>
+                    <a:pt x="0" y="218900"/>
+                  </a:lnTo>
+                  <a:lnTo>
+                    <a:pt x="1398464" y="218900"/>
                   </a:lnTo>
                 </a:path>
               </a:pathLst>
@@ -4109,25 +4109,28 @@
           </p:nvSpPr>
           <p:spPr>
             <a:xfrm>
-              <a:off x="3657600" y="1455644"/>
-              <a:ext cx="0" cy="665606"/>
+              <a:off x="5056064" y="1902349"/>
+              <a:ext cx="0" cy="0"/>
             </a:xfrm>
             <a:custGeom>
               <a:avLst/>
               <a:pathLst>
-                <a:path w="0" h="665606">
+                <a:path w="0" h="0">
                   <a:moveTo>
                     <a:pt x="0" y="0"/>
                   </a:moveTo>
                   <a:lnTo>
-                    <a:pt x="0" y="665606"/>
+                    <a:pt x="0" y="0"/>
+                  </a:lnTo>
+                  <a:lnTo>
+                    <a:pt x="0" y="0"/>
                   </a:lnTo>
                 </a:path>
               </a:pathLst>
             </a:custGeom>
-            <a:ln w="14287" cap="rnd">
+            <a:ln w="23812" cap="rnd">
               <a:solidFill>
-                <a:srgbClr val="333333">
+                <a:srgbClr val="E5E5E5">
                   <a:alpha val="100000"/>
                 </a:srgbClr>
               </a:solidFill>
@@ -4149,21 +4152,18 @@
           </p:nvSpPr>
           <p:spPr>
             <a:xfrm>
-              <a:off x="3657600" y="2121250"/>
-              <a:ext cx="0" cy="0"/>
+              <a:off x="3657600" y="1683448"/>
+              <a:ext cx="0" cy="437801"/>
             </a:xfrm>
             <a:custGeom>
               <a:avLst/>
               <a:pathLst>
-                <a:path w="0" h="0">
+                <a:path w="0" h="437801">
                   <a:moveTo>
                     <a:pt x="0" y="0"/>
                   </a:moveTo>
                   <a:lnTo>
-                    <a:pt x="0" y="0"/>
-                  </a:lnTo>
-                  <a:lnTo>
-                    <a:pt x="0" y="0"/>
+                    <a:pt x="0" y="437801"/>
                   </a:lnTo>
                 </a:path>
               </a:pathLst>
@@ -4192,31 +4192,28 @@
           </p:nvSpPr>
           <p:spPr>
             <a:xfrm>
-              <a:off x="2286000" y="3464541"/>
-              <a:ext cx="1371600" cy="548721"/>
+              <a:off x="3657600" y="2121250"/>
+              <a:ext cx="0" cy="0"/>
             </a:xfrm>
             <a:custGeom>
               <a:avLst/>
               <a:pathLst>
-                <a:path w="1371600" h="548721">
+                <a:path w="0" h="0">
                   <a:moveTo>
-                    <a:pt x="1371600" y="0"/>
+                    <a:pt x="0" y="0"/>
                   </a:moveTo>
                   <a:lnTo>
-                    <a:pt x="1371600" y="393630"/>
-                  </a:lnTo>
-                  <a:lnTo>
-                    <a:pt x="0" y="393630"/>
-                  </a:lnTo>
-                  <a:lnTo>
-                    <a:pt x="0" y="548721"/>
+                    <a:pt x="0" y="0"/>
+                  </a:lnTo>
+                  <a:lnTo>
+                    <a:pt x="0" y="0"/>
                   </a:lnTo>
                 </a:path>
               </a:pathLst>
             </a:custGeom>
             <a:ln w="14287" cap="rnd">
               <a:solidFill>
-                <a:srgbClr val="0099FF">
+                <a:srgbClr val="333333">
                   <a:alpha val="100000"/>
                 </a:srgbClr>
               </a:solidFill>
@@ -4238,21 +4235,24 @@
           </p:nvSpPr>
           <p:spPr>
             <a:xfrm>
-              <a:off x="2286000" y="4013263"/>
-              <a:ext cx="0" cy="0"/>
+              <a:off x="2286000" y="3464541"/>
+              <a:ext cx="1371600" cy="548721"/>
             </a:xfrm>
             <a:custGeom>
               <a:avLst/>
               <a:pathLst>
-                <a:path w="0" h="0">
+                <a:path w="1371600" h="548721">
                   <a:moveTo>
-                    <a:pt x="0" y="0"/>
+                    <a:pt x="1371600" y="0"/>
                   </a:moveTo>
                   <a:lnTo>
-                    <a:pt x="0" y="0"/>
-                  </a:lnTo>
-                  <a:lnTo>
-                    <a:pt x="0" y="0"/>
+                    <a:pt x="1371600" y="393630"/>
+                  </a:lnTo>
+                  <a:lnTo>
+                    <a:pt x="0" y="393630"/>
+                  </a:lnTo>
+                  <a:lnTo>
+                    <a:pt x="0" y="548721"/>
                   </a:lnTo>
                 </a:path>
               </a:pathLst>
@@ -4281,24 +4281,21 @@
           </p:nvSpPr>
           <p:spPr>
             <a:xfrm>
-              <a:off x="3657600" y="3464541"/>
-              <a:ext cx="1371600" cy="548721"/>
+              <a:off x="2286000" y="4013263"/>
+              <a:ext cx="0" cy="0"/>
             </a:xfrm>
             <a:custGeom>
               <a:avLst/>
               <a:pathLst>
-                <a:path w="1371600" h="548721">
+                <a:path w="0" h="0">
                   <a:moveTo>
                     <a:pt x="0" y="0"/>
                   </a:moveTo>
                   <a:lnTo>
-                    <a:pt x="0" y="393630"/>
-                  </a:lnTo>
-                  <a:lnTo>
-                    <a:pt x="1371600" y="393630"/>
-                  </a:lnTo>
-                  <a:lnTo>
-                    <a:pt x="1371600" y="548721"/>
+                    <a:pt x="0" y="0"/>
+                  </a:lnTo>
+                  <a:lnTo>
+                    <a:pt x="0" y="0"/>
                   </a:lnTo>
                 </a:path>
               </a:pathLst>
@@ -4322,6 +4319,52 @@
         <p:sp>
           <p:nvSpPr>
             <p:cNvPr id="35" name="pl35"/>
+            <p:cNvSpPr/>
+            <p:nvPr/>
+          </p:nvSpPr>
+          <p:spPr>
+            <a:xfrm>
+              <a:off x="3657600" y="3464541"/>
+              <a:ext cx="1371600" cy="548721"/>
+            </a:xfrm>
+            <a:custGeom>
+              <a:avLst/>
+              <a:pathLst>
+                <a:path w="1371600" h="548721">
+                  <a:moveTo>
+                    <a:pt x="0" y="0"/>
+                  </a:moveTo>
+                  <a:lnTo>
+                    <a:pt x="0" y="393630"/>
+                  </a:lnTo>
+                  <a:lnTo>
+                    <a:pt x="1371600" y="393630"/>
+                  </a:lnTo>
+                  <a:lnTo>
+                    <a:pt x="1371600" y="548721"/>
+                  </a:lnTo>
+                </a:path>
+              </a:pathLst>
+            </a:custGeom>
+            <a:ln w="14287" cap="rnd">
+              <a:solidFill>
+                <a:srgbClr val="0099FF">
+                  <a:alpha val="100000"/>
+                </a:srgbClr>
+              </a:solidFill>
+              <a:prstDash val="solid"/>
+              <a:round/>
+            </a:ln>
+          </p:spPr>
+          <p:txBody>
+            <a:bodyPr/>
+            <a:lstStyle/>
+            <a:p/>
+          </p:txBody>
+        </p:sp>
+        <p:sp>
+          <p:nvSpPr>
+            <p:cNvPr id="36" name="pl36"/>
             <p:cNvSpPr/>
             <p:nvPr/>
           </p:nvSpPr>

--- a/output/fig_flowchart.pptx
+++ b/output/fig_flowchart.pptx
@@ -2861,7 +2861,7 @@
           <p:spPr>
             <a:xfrm>
               <a:off x="5272064" y="1421969"/>
-              <a:ext cx="1140439" cy="92080"/>
+              <a:ext cx="1717700" cy="92080"/>
             </a:xfrm>
             <a:prstGeom prst="rect">
               <a:avLst/>
@@ -2890,7 +2890,7 @@
                   <a:latin typeface="Luciole"/>
                   <a:cs typeface="Luciole"/>
                 </a:rPr>
-                <a:t>Exclusion (n = 230)</a:t>
+                <a:t>Exclusion (n = 230, 69,1 %)</a:t>
               </a:r>
             </a:p>
           </p:txBody>
@@ -3306,7 +3306,7 @@
           <p:spPr>
             <a:xfrm>
               <a:off x="2526761" y="2337250"/>
-              <a:ext cx="1316278" cy="106619"/>
+              <a:ext cx="1995677" cy="106619"/>
             </a:xfrm>
             <a:prstGeom prst="rect">
               <a:avLst/>
@@ -3335,7 +3335,7 @@
                   <a:latin typeface="Luciole"/>
                   <a:cs typeface="Luciole"/>
                 </a:rPr>
-                <a:t>Inclusion (n = 103)</a:t>
+                <a:t>Inclusion (n = 103, 30,9 %)</a:t>
               </a:r>
             </a:p>
           </p:txBody>
@@ -3750,8 +3750,8 @@
           </p:nvSpPr>
           <p:spPr>
             <a:xfrm>
-              <a:off x="2012411" y="4430431"/>
-              <a:ext cx="547176" cy="106619"/>
+              <a:off x="1321948" y="4430431"/>
+              <a:ext cx="1928103" cy="106619"/>
             </a:xfrm>
             <a:prstGeom prst="rect">
               <a:avLst/>
@@ -3780,7 +3780,7 @@
                   <a:latin typeface="Luciole"/>
                   <a:cs typeface="Luciole"/>
                 </a:rPr>
-                <a:t>(n = 53)</a:t>
+                <a:t>(n = 53, 51,5 % des inclus)</a:t>
               </a:r>
             </a:p>
           </p:txBody>
@@ -4023,8 +4023,8 @@
           </p:nvSpPr>
           <p:spPr>
             <a:xfrm>
-              <a:off x="4747061" y="4430431"/>
-              <a:ext cx="564276" cy="106619"/>
+              <a:off x="4043476" y="4430431"/>
+              <a:ext cx="1971446" cy="106619"/>
             </a:xfrm>
             <a:prstGeom prst="rect">
               <a:avLst/>
@@ -4053,7 +4053,7 @@
                   <a:latin typeface="Luciole"/>
                   <a:cs typeface="Luciole"/>
                 </a:rPr>
-                <a:t>(n = 50)</a:t>
+                <a:t>(n = 50, 48,5 % des inclus)</a:t>
               </a:r>
             </a:p>
           </p:txBody>
